--- a/docs/Proyecto2_Presentacion.pptx
+++ b/docs/Proyecto2_Presentacion.pptx
@@ -6,15 +6,21 @@
   </p:sldMasterIdLst>
   <p:sldIdLst>
     <p:sldId id="256" r:id="rId7"/>
-    <p:sldId id="257" r:id="rId8"/>
-    <p:sldId id="258" r:id="rId9"/>
-    <p:sldId id="259" r:id="rId10"/>
-    <p:sldId id="260" r:id="rId11"/>
-    <p:sldId id="261" r:id="rId12"/>
-    <p:sldId id="262" r:id="rId13"/>
-    <p:sldId id="263" r:id="rId14"/>
-    <p:sldId id="264" r:id="rId15"/>
-    <p:sldId id="265" r:id="rId16"/>
+    <p:sldId id="257" r:id="rId9"/>
+    <p:sldId id="258" r:id="rId10"/>
+    <p:sldId id="259" r:id="rId11"/>
+    <p:sldId id="260" r:id="rId12"/>
+    <p:sldId id="261" r:id="rId13"/>
+    <p:sldId id="262" r:id="rId14"/>
+    <p:sldId id="263" r:id="rId15"/>
+    <p:sldId id="264" r:id="rId16"/>
+    <p:sldId id="265" r:id="rId17"/>
+    <p:sldId id="266" r:id="rId18"/>
+    <p:sldId id="267" r:id="rId19"/>
+    <p:sldId id="268" r:id="rId20"/>
+    <p:sldId id="269" r:id="rId21"/>
+    <p:sldId id="270" r:id="rId22"/>
+    <p:sldId id="271" r:id="rId23"/>
   </p:sldIdLst>
   <p:sldSz cx="12191695" cy="6858000" type="screen4x3"/>
   <p:notesSz cx="6858000" cy="9144000"/>
@@ -114,6 +120,2194 @@
     </a:lvl9pPr>
   </p:defaultTextStyle>
 </p:presentation>
+</file>
+
+<file path=ppt/notesMasters/notesMaster1.xml><?xml version="1.0" encoding="utf-8"?>
+<p:notesMaster xmlns:a="http://schemas.openxmlformats.org/drawingml/2006/main" xmlns:p="http://schemas.openxmlformats.org/presentationml/2006/main" xmlns:r="http://schemas.openxmlformats.org/officeDocument/2006/relationships">
+  <p:cSld>
+    <p:bg>
+      <p:bgRef idx="1001">
+        <a:schemeClr val="bg1"/>
+      </p:bgRef>
+    </p:bg>
+    <p:spTree>
+      <p:nvGrpSpPr>
+        <p:cNvPr id="1" name=""/>
+        <p:cNvGrpSpPr/>
+        <p:nvPr/>
+      </p:nvGrpSpPr>
+      <p:grpSpPr>
+        <a:xfrm>
+          <a:off x="0" y="0"/>
+          <a:ext cx="0" cy="0"/>
+          <a:chOff x="0" y="0"/>
+          <a:chExt cx="0" cy="0"/>
+        </a:xfrm>
+      </p:grpSpPr>
+      <p:sp>
+        <p:nvSpPr>
+          <p:cNvPr id="2" name="Header Placeholder 1"/>
+          <p:cNvSpPr>
+            <a:spLocks noGrp="1"/>
+          </p:cNvSpPr>
+          <p:nvPr>
+            <p:ph type="hdr" sz="quarter"/>
+          </p:nvPr>
+        </p:nvSpPr>
+        <p:spPr>
+          <a:xfrm>
+            <a:off x="0" y="0"/>
+            <a:ext cx="2971800" cy="457200"/>
+          </a:xfrm>
+          <a:prstGeom prst="rect">
+            <a:avLst/>
+          </a:prstGeom>
+        </p:spPr>
+        <p:txBody>
+          <a:bodyPr vert="horz" lIns="91440" tIns="45720" rIns="91440" bIns="45720" rtlCol="0"/>
+          <a:lstStyle>
+            <a:lvl1pPr algn="l">
+              <a:defRPr sz="1200"/>
+            </a:lvl1pPr>
+          </a:lstStyle>
+          <a:p>
+            <a:endParaRPr lang="en-US"/>
+          </a:p>
+        </p:txBody>
+      </p:sp>
+      <p:sp>
+        <p:nvSpPr>
+          <p:cNvPr id="3" name="Date Placeholder 2"/>
+          <p:cNvSpPr>
+            <a:spLocks noGrp="1"/>
+          </p:cNvSpPr>
+          <p:nvPr>
+            <p:ph type="dt" idx="1"/>
+          </p:nvPr>
+        </p:nvSpPr>
+        <p:spPr>
+          <a:xfrm>
+            <a:off x="3884613" y="0"/>
+            <a:ext cx="2971800" cy="457200"/>
+          </a:xfrm>
+          <a:prstGeom prst="rect">
+            <a:avLst/>
+          </a:prstGeom>
+        </p:spPr>
+        <p:txBody>
+          <a:bodyPr vert="horz" lIns="91440" tIns="45720" rIns="91440" bIns="45720" rtlCol="0"/>
+          <a:lstStyle>
+            <a:lvl1pPr algn="r">
+              <a:defRPr sz="1200"/>
+            </a:lvl1pPr>
+          </a:lstStyle>
+          <a:p>
+            <a:fld id="{0F89C1C7-3DCD-1040-A9CF-14679D8B5DDD}" type="datetimeFigureOut">
+              <a:rPr lang="en-US" smtClean="0"/>
+              <a:t>10/17/16</a:t>
+            </a:fld>
+            <a:endParaRPr lang="en-US"/>
+          </a:p>
+        </p:txBody>
+      </p:sp>
+      <p:sp>
+        <p:nvSpPr>
+          <p:cNvPr id="4" name="Slide Image Placeholder 3"/>
+          <p:cNvSpPr>
+            <a:spLocks noGrp="1" noRot="1" noChangeAspect="1"/>
+          </p:cNvSpPr>
+          <p:nvPr>
+            <p:ph type="sldImg" idx="2"/>
+          </p:nvPr>
+        </p:nvSpPr>
+        <p:spPr>
+          <a:xfrm>
+            <a:off x="1143000" y="685800"/>
+            <a:ext cx="4572000" cy="3429000"/>
+          </a:xfrm>
+          <a:prstGeom prst="rect">
+            <a:avLst/>
+          </a:prstGeom>
+          <a:noFill/>
+          <a:ln w="12700">
+            <a:solidFill>
+              <a:prstClr val="black"/>
+            </a:solidFill>
+          </a:ln>
+        </p:spPr>
+        <p:txBody>
+          <a:bodyPr vert="horz" lIns="91440" tIns="45720" rIns="91440" bIns="45720" rtlCol="0" anchor="ctr"/>
+          <a:lstStyle/>
+          <a:p>
+            <a:endParaRPr lang="en-US"/>
+          </a:p>
+        </p:txBody>
+      </p:sp>
+      <p:sp>
+        <p:nvSpPr>
+          <p:cNvPr id="5" name="Notes Placeholder 4"/>
+          <p:cNvSpPr>
+            <a:spLocks noGrp="1"/>
+          </p:cNvSpPr>
+          <p:nvPr>
+            <p:ph type="body" sz="quarter" idx="3"/>
+          </p:nvPr>
+        </p:nvSpPr>
+        <p:spPr>
+          <a:xfrm>
+            <a:off x="685800" y="4343400"/>
+            <a:ext cx="5486400" cy="4114800"/>
+          </a:xfrm>
+          <a:prstGeom prst="rect">
+            <a:avLst/>
+          </a:prstGeom>
+        </p:spPr>
+        <p:txBody>
+          <a:bodyPr vert="horz" lIns="91440" tIns="45720" rIns="91440" bIns="45720" rtlCol="0"/>
+          <a:lstStyle/>
+          <a:p>
+            <a:pPr lvl="0"/>
+            <a:r>
+              <a:rPr lang="en-US" smtClean="0"/>
+              <a:t>Click to edit Master text styles</a:t>
+            </a:r>
+          </a:p>
+          <a:p>
+            <a:pPr lvl="1"/>
+            <a:r>
+              <a:rPr lang="en-US" smtClean="0"/>
+              <a:t>Second level</a:t>
+            </a:r>
+          </a:p>
+          <a:p>
+            <a:pPr lvl="2"/>
+            <a:r>
+              <a:rPr lang="en-US" smtClean="0"/>
+              <a:t>Third level</a:t>
+            </a:r>
+          </a:p>
+          <a:p>
+            <a:pPr lvl="3"/>
+            <a:r>
+              <a:rPr lang="en-US" smtClean="0"/>
+              <a:t>Fourth level</a:t>
+            </a:r>
+          </a:p>
+          <a:p>
+            <a:pPr lvl="4"/>
+            <a:r>
+              <a:rPr lang="en-US" smtClean="0"/>
+              <a:t>Fifth level</a:t>
+            </a:r>
+            <a:endParaRPr lang="en-US"/>
+          </a:p>
+        </p:txBody>
+      </p:sp>
+      <p:sp>
+        <p:nvSpPr>
+          <p:cNvPr id="6" name="Footer Placeholder 5"/>
+          <p:cNvSpPr>
+            <a:spLocks noGrp="1"/>
+          </p:cNvSpPr>
+          <p:nvPr>
+            <p:ph type="ftr" sz="quarter" idx="4"/>
+          </p:nvPr>
+        </p:nvSpPr>
+        <p:spPr>
+          <a:xfrm>
+            <a:off x="0" y="8685213"/>
+            <a:ext cx="2971800" cy="457200"/>
+          </a:xfrm>
+          <a:prstGeom prst="rect">
+            <a:avLst/>
+          </a:prstGeom>
+        </p:spPr>
+        <p:txBody>
+          <a:bodyPr vert="horz" lIns="91440" tIns="45720" rIns="91440" bIns="45720" rtlCol="0" anchor="b"/>
+          <a:lstStyle>
+            <a:lvl1pPr algn="l">
+              <a:defRPr sz="1200"/>
+            </a:lvl1pPr>
+          </a:lstStyle>
+          <a:p>
+            <a:endParaRPr lang="en-US"/>
+          </a:p>
+        </p:txBody>
+      </p:sp>
+      <p:sp>
+        <p:nvSpPr>
+          <p:cNvPr id="7" name="Slide Number Placeholder 6"/>
+          <p:cNvSpPr>
+            <a:spLocks noGrp="1"/>
+          </p:cNvSpPr>
+          <p:nvPr>
+            <p:ph type="sldNum" sz="quarter" idx="5"/>
+          </p:nvPr>
+        </p:nvSpPr>
+        <p:spPr>
+          <a:xfrm>
+            <a:off x="3884613" y="8685213"/>
+            <a:ext cx="2971800" cy="457200"/>
+          </a:xfrm>
+          <a:prstGeom prst="rect">
+            <a:avLst/>
+          </a:prstGeom>
+        </p:spPr>
+        <p:txBody>
+          <a:bodyPr vert="horz" lIns="91440" tIns="45720" rIns="91440" bIns="45720" rtlCol="0" anchor="b"/>
+          <a:lstStyle>
+            <a:lvl1pPr algn="r">
+              <a:defRPr sz="1200"/>
+            </a:lvl1pPr>
+          </a:lstStyle>
+          <a:p>
+            <a:fld id="{BB5E49A5-4136-284D-997B-48E1D791AD67}" type="slidenum">
+              <a:rPr lang="en-US" smtClean="0"/>
+              <a:t>‹#›</a:t>
+            </a:fld>
+            <a:endParaRPr lang="en-US"/>
+          </a:p>
+        </p:txBody>
+      </p:sp>
+    </p:spTree>
+    <p:extLst>
+      <p:ext uri="{BB962C8B-B14F-4D97-AF65-F5344CB8AC3E}">
+        <p14:creationId xmlns:p14="http://schemas.microsoft.com/office/powerpoint/2010/main" val="2623252185"/>
+      </p:ext>
+    </p:extLst>
+  </p:cSld>
+  <p:clrMap bg1="lt1" tx1="dk1" bg2="lt2" tx2="dk2" accent1="accent1" accent2="accent2" accent3="accent3" accent4="accent4" accent5="accent5" accent6="accent6" hlink="hlink" folHlink="folHlink"/>
+  <p:notesStyle>
+    <a:lvl1pPr marL="0" algn="l" defTabSz="457200" rtl="0" eaLnBrk="1" latinLnBrk="0" hangingPunct="1">
+      <a:defRPr sz="1200" kern="1200">
+        <a:solidFill>
+          <a:schemeClr val="tx1"/>
+        </a:solidFill>
+        <a:latin typeface="+mn-lt"/>
+        <a:ea typeface="+mn-ea"/>
+        <a:cs typeface="+mn-cs"/>
+      </a:defRPr>
+    </a:lvl1pPr>
+    <a:lvl2pPr marL="457200" algn="l" defTabSz="457200" rtl="0" eaLnBrk="1" latinLnBrk="0" hangingPunct="1">
+      <a:defRPr sz="1200" kern="1200">
+        <a:solidFill>
+          <a:schemeClr val="tx1"/>
+        </a:solidFill>
+        <a:latin typeface="+mn-lt"/>
+        <a:ea typeface="+mn-ea"/>
+        <a:cs typeface="+mn-cs"/>
+      </a:defRPr>
+    </a:lvl2pPr>
+    <a:lvl3pPr marL="914400" algn="l" defTabSz="457200" rtl="0" eaLnBrk="1" latinLnBrk="0" hangingPunct="1">
+      <a:defRPr sz="1200" kern="1200">
+        <a:solidFill>
+          <a:schemeClr val="tx1"/>
+        </a:solidFill>
+        <a:latin typeface="+mn-lt"/>
+        <a:ea typeface="+mn-ea"/>
+        <a:cs typeface="+mn-cs"/>
+      </a:defRPr>
+    </a:lvl3pPr>
+    <a:lvl4pPr marL="1371600" algn="l" defTabSz="457200" rtl="0" eaLnBrk="1" latinLnBrk="0" hangingPunct="1">
+      <a:defRPr sz="1200" kern="1200">
+        <a:solidFill>
+          <a:schemeClr val="tx1"/>
+        </a:solidFill>
+        <a:latin typeface="+mn-lt"/>
+        <a:ea typeface="+mn-ea"/>
+        <a:cs typeface="+mn-cs"/>
+      </a:defRPr>
+    </a:lvl4pPr>
+    <a:lvl5pPr marL="1828800" algn="l" defTabSz="457200" rtl="0" eaLnBrk="1" latinLnBrk="0" hangingPunct="1">
+      <a:defRPr sz="1200" kern="1200">
+        <a:solidFill>
+          <a:schemeClr val="tx1"/>
+        </a:solidFill>
+        <a:latin typeface="+mn-lt"/>
+        <a:ea typeface="+mn-ea"/>
+        <a:cs typeface="+mn-cs"/>
+      </a:defRPr>
+    </a:lvl5pPr>
+    <a:lvl6pPr marL="2286000" algn="l" defTabSz="457200" rtl="0" eaLnBrk="1" latinLnBrk="0" hangingPunct="1">
+      <a:defRPr sz="1200" kern="1200">
+        <a:solidFill>
+          <a:schemeClr val="tx1"/>
+        </a:solidFill>
+        <a:latin typeface="+mn-lt"/>
+        <a:ea typeface="+mn-ea"/>
+        <a:cs typeface="+mn-cs"/>
+      </a:defRPr>
+    </a:lvl6pPr>
+    <a:lvl7pPr marL="2743200" algn="l" defTabSz="457200" rtl="0" eaLnBrk="1" latinLnBrk="0" hangingPunct="1">
+      <a:defRPr sz="1200" kern="1200">
+        <a:solidFill>
+          <a:schemeClr val="tx1"/>
+        </a:solidFill>
+        <a:latin typeface="+mn-lt"/>
+        <a:ea typeface="+mn-ea"/>
+        <a:cs typeface="+mn-cs"/>
+      </a:defRPr>
+    </a:lvl7pPr>
+    <a:lvl8pPr marL="3200400" algn="l" defTabSz="457200" rtl="0" eaLnBrk="1" latinLnBrk="0" hangingPunct="1">
+      <a:defRPr sz="1200" kern="1200">
+        <a:solidFill>
+          <a:schemeClr val="tx1"/>
+        </a:solidFill>
+        <a:latin typeface="+mn-lt"/>
+        <a:ea typeface="+mn-ea"/>
+        <a:cs typeface="+mn-cs"/>
+      </a:defRPr>
+    </a:lvl8pPr>
+    <a:lvl9pPr marL="3657600" algn="l" defTabSz="457200" rtl="0" eaLnBrk="1" latinLnBrk="0" hangingPunct="1">
+      <a:defRPr sz="1200" kern="1200">
+        <a:solidFill>
+          <a:schemeClr val="tx1"/>
+        </a:solidFill>
+        <a:latin typeface="+mn-lt"/>
+        <a:ea typeface="+mn-ea"/>
+        <a:cs typeface="+mn-cs"/>
+      </a:defRPr>
+    </a:lvl9pPr>
+  </p:notesStyle>
+</p:notesMaster>
+</file>
+
+<file path=ppt/notesSlides/notesSlide1.xml><?xml version="1.0" encoding="utf-8"?>
+<p:notes xmlns:a="http://schemas.openxmlformats.org/drawingml/2006/main" xmlns:p="http://schemas.openxmlformats.org/presentationml/2006/main" xmlns:r="http://schemas.openxmlformats.org/officeDocument/2006/relationships">
+  <p:cSld>
+    <p:spTree>
+      <p:nvGrpSpPr>
+        <p:cNvPr id="1" name=""/>
+        <p:cNvGrpSpPr/>
+        <p:nvPr/>
+      </p:nvGrpSpPr>
+      <p:grpSpPr>
+        <a:xfrm>
+          <a:off x="0" y="0"/>
+          <a:ext cx="0" cy="0"/>
+          <a:chOff x="0" y="0"/>
+          <a:chExt cx="0" cy="0"/>
+        </a:xfrm>
+      </p:grpSpPr>
+      <p:sp>
+        <p:nvSpPr>
+          <p:cNvPr id="2" name="Slide Image Placeholder 1"/>
+          <p:cNvSpPr>
+            <a:spLocks noGrp="1"/>
+          </p:cNvSpPr>
+          <p:nvPr>
+            <p:ph type="sldImg" idx="2"/>
+          </p:nvPr>
+        </p:nvSpPr>
+        <p:spPr/>
+      </p:sp>
+      <p:sp>
+        <p:nvSpPr>
+          <p:cNvPr id="3" name="Notes Placeholder 2"/>
+          <p:cNvSpPr>
+            <a:spLocks noGrp="1"/>
+          </p:cNvSpPr>
+          <p:nvPr>
+            <p:ph type="body" idx="3" sz="quarter"/>
+          </p:nvPr>
+        </p:nvSpPr>
+        <p:spPr/>
+        <p:txBody>
+          <a:bodyPr/>
+          <a:lstStyle/>
+          <a:p>
+            <a:r>
+              <a:t>[Integrante 1 · 0:15]</a:t>
+            </a:r>
+          </a:p>
+          <a:p/>
+          <a:p>
+            <a:r>
+              <a:t>Presentarse y presentar el reto en una frase: es una competencia de la ITU, alojada</a:t>
+            </a:r>
+          </a:p>
+          <a:p>
+            <a:r>
+              <a:t>en Zindi, sobre pronosticar el agua almacenada del planeta. Decir que en 15 minutos</a:t>
+            </a:r>
+          </a:p>
+          <a:p>
+            <a:r>
+              <a:t>se recorre el problema, los datos, los patrones encontrados y hacia dónde apunta el</a:t>
+            </a:r>
+          </a:p>
+          <a:p>
+            <a:r>
+              <a:t>modelado. No leer la diapositiva.</a:t>
+            </a:r>
+          </a:p>
+        </p:txBody>
+      </p:sp>
+      <p:sp>
+        <p:nvSpPr>
+          <p:cNvPr id="4" name="Slide Number Placeholder 3"/>
+          <p:cNvSpPr>
+            <a:spLocks noGrp="1"/>
+          </p:cNvSpPr>
+          <p:nvPr>
+            <p:ph type="sldNum" idx="5" sz="quarter"/>
+          </p:nvPr>
+        </p:nvSpPr>
+        <p:spPr/>
+      </p:sp>
+    </p:spTree>
+  </p:cSld>
+  <p:clrMapOvr>
+    <a:masterClrMapping/>
+  </p:clrMapOvr>
+</p:notes>
+</file>
+
+<file path=ppt/notesSlides/notesSlide10.xml><?xml version="1.0" encoding="utf-8"?>
+<p:notes xmlns:a="http://schemas.openxmlformats.org/drawingml/2006/main" xmlns:p="http://schemas.openxmlformats.org/presentationml/2006/main" xmlns:r="http://schemas.openxmlformats.org/officeDocument/2006/relationships">
+  <p:cSld>
+    <p:spTree>
+      <p:nvGrpSpPr>
+        <p:cNvPr id="1" name=""/>
+        <p:cNvGrpSpPr/>
+        <p:nvPr/>
+      </p:nvGrpSpPr>
+      <p:grpSpPr>
+        <a:xfrm>
+          <a:off x="0" y="0"/>
+          <a:ext cx="0" cy="0"/>
+          <a:chOff x="0" y="0"/>
+          <a:chExt cx="0" cy="0"/>
+        </a:xfrm>
+      </p:grpSpPr>
+      <p:sp>
+        <p:nvSpPr>
+          <p:cNvPr id="2" name="Slide Image Placeholder 1"/>
+          <p:cNvSpPr>
+            <a:spLocks noGrp="1"/>
+          </p:cNvSpPr>
+          <p:nvPr>
+            <p:ph type="sldImg" idx="2"/>
+          </p:nvPr>
+        </p:nvSpPr>
+        <p:spPr/>
+      </p:sp>
+      <p:sp>
+        <p:nvSpPr>
+          <p:cNvPr id="3" name="Notes Placeholder 2"/>
+          <p:cNvSpPr>
+            <a:spLocks noGrp="1"/>
+          </p:cNvSpPr>
+          <p:nvPr>
+            <p:ph type="body" idx="3" sz="quarter"/>
+          </p:nvPr>
+        </p:nvSpPr>
+        <p:spPr/>
+        <p:txBody>
+          <a:bodyPr/>
+          <a:lstStyle/>
+          <a:p>
+            <a:r>
+              <a:t>[Integrante 3 · 1:00]</a:t>
+            </a:r>
+          </a:p>
+          <a:p/>
+          <a:p>
+            <a:r>
+              <a:t>Explicar primero qué es una descomposición, en una frase por componente:</a:t>
+            </a:r>
+          </a:p>
+          <a:p>
+            <a:r>
+              <a:t>la tendencia es el movimiento de fondo, la estacionalidad el patrón que se repite</a:t>
+            </a:r>
+          </a:p>
+          <a:p>
+            <a:r>
+              <a:t>cada 12 meses, y el residuo lo que no explican las otras dos.</a:t>
+            </a:r>
+          </a:p>
+          <a:p/>
+          <a:p>
+            <a:r>
+              <a:t>Luego dar los porcentajes. El dato llamativo es el 3 % de estacionalidad: en una</a:t>
+            </a:r>
+          </a:p>
+          <a:p>
+            <a:r>
+              <a:t>variable hidrológica uno esperaría un ciclo anual fuerte.</a:t>
+            </a:r>
+          </a:p>
+          <a:p/>
+          <a:p>
+            <a:r>
+              <a:t>No resolver el misterio todavía. Plantearlo como pregunta abierta y pasar a la</a:t>
+            </a:r>
+          </a:p>
+          <a:p>
+            <a:r>
+              <a:t>siguiente diapositiva, que es donde se explica.</a:t>
+            </a:r>
+          </a:p>
+          <a:p/>
+          <a:p>
+            <a:r>
+              <a:t>Nota técnica por si preguntan: para descomponer hubo que rellenar los 22 meses</a:t>
+            </a:r>
+          </a:p>
+          <a:p>
+            <a:r>
+              <a:t>ausentes por interpolación, porque la función no admite huecos. Esa interpolación</a:t>
+            </a:r>
+          </a:p>
+          <a:p>
+            <a:r>
+              <a:t>se usó solo aquí y no se propagó al resto del análisis.</a:t>
+            </a:r>
+          </a:p>
+        </p:txBody>
+      </p:sp>
+      <p:sp>
+        <p:nvSpPr>
+          <p:cNvPr id="4" name="Slide Number Placeholder 3"/>
+          <p:cNvSpPr>
+            <a:spLocks noGrp="1"/>
+          </p:cNvSpPr>
+          <p:nvPr>
+            <p:ph type="sldNum" idx="5" sz="quarter"/>
+          </p:nvPr>
+        </p:nvSpPr>
+        <p:spPr/>
+      </p:sp>
+    </p:spTree>
+  </p:cSld>
+  <p:clrMapOvr>
+    <a:masterClrMapping/>
+  </p:clrMapOvr>
+</p:notes>
+</file>
+
+<file path=ppt/notesSlides/notesSlide11.xml><?xml version="1.0" encoding="utf-8"?>
+<p:notes xmlns:a="http://schemas.openxmlformats.org/drawingml/2006/main" xmlns:p="http://schemas.openxmlformats.org/presentationml/2006/main" xmlns:r="http://schemas.openxmlformats.org/officeDocument/2006/relationships">
+  <p:cSld>
+    <p:spTree>
+      <p:nvGrpSpPr>
+        <p:cNvPr id="1" name=""/>
+        <p:cNvGrpSpPr/>
+        <p:nvPr/>
+      </p:nvGrpSpPr>
+      <p:grpSpPr>
+        <a:xfrm>
+          <a:off x="0" y="0"/>
+          <a:ext cx="0" cy="0"/>
+          <a:chOff x="0" y="0"/>
+          <a:chExt cx="0" cy="0"/>
+        </a:xfrm>
+      </p:grpSpPr>
+      <p:sp>
+        <p:nvSpPr>
+          <p:cNvPr id="2" name="Slide Image Placeholder 1"/>
+          <p:cNvSpPr>
+            <a:spLocks noGrp="1"/>
+          </p:cNvSpPr>
+          <p:nvPr>
+            <p:ph type="sldImg" idx="2"/>
+          </p:nvPr>
+        </p:nvSpPr>
+        <p:spPr/>
+      </p:sp>
+      <p:sp>
+        <p:nvSpPr>
+          <p:cNvPr id="3" name="Notes Placeholder 2"/>
+          <p:cNvSpPr>
+            <a:spLocks noGrp="1"/>
+          </p:cNvSpPr>
+          <p:nvPr>
+            <p:ph type="body" idx="3" sz="quarter"/>
+          </p:nvPr>
+        </p:nvSpPr>
+        <p:spPr/>
+        <p:txBody>
+          <a:bodyPr/>
+          <a:lstStyle/>
+          <a:p>
+            <a:r>
+              <a:t>[Integrante 3 · 1:20]</a:t>
+            </a:r>
+          </a:p>
+          <a:p/>
+          <a:p>
+            <a:r>
+              <a:t>Esta es la diapositiva más importante del bloque y la lección metodológica del</a:t>
+            </a:r>
+          </a:p>
+          <a:p>
+            <a:r>
+              <a:t>proyecto. Darle tiempo.</a:t>
+            </a:r>
+          </a:p>
+          <a:p/>
+          <a:p>
+            <a:r>
+              <a:t>Señalar las dos curvas de la izquierda: la azul es el norte, la naranja el sur. Van</a:t>
+            </a:r>
+          </a:p>
+          <a:p>
+            <a:r>
+              <a:t>en direcciones opuestas. Cuando se promedian, se cancelan, y por eso la</a:t>
+            </a:r>
+          </a:p>
+          <a:p>
+            <a:r>
+              <a:t>descomposición global mostraba apenas 3 % de estacionalidad.</a:t>
+            </a:r>
+          </a:p>
+          <a:p/>
+          <a:p>
+            <a:r>
+              <a:t>La conclusión que debe quedar: no es que el agua no tenga ciclo anual. Es que una</a:t>
+            </a:r>
+          </a:p>
+          <a:p>
+            <a:r>
+              <a:t>serie agregada globalmente no es el objeto adecuado para estudiarlo.</a:t>
+            </a:r>
+          </a:p>
+          <a:p/>
+          <a:p>
+            <a:r>
+              <a:t>Agregar el matiz del desbalance: como el 80 % de las celdas están en el norte, la</a:t>
+            </a:r>
+          </a:p>
+          <a:p>
+            <a:r>
+              <a:t>serie "global" es en buena medida la serie del hemisferio norte.</a:t>
+            </a:r>
+          </a:p>
+          <a:p/>
+          <a:p>
+            <a:r>
+              <a:t>Si hay tiempo, mencionar que al cruzar banda de latitud contra mes el ciclo anual</a:t>
+            </a:r>
+          </a:p>
+          <a:p>
+            <a:r>
+              <a:t>reaparece con claridad dentro de cada región.</a:t>
+            </a:r>
+          </a:p>
+        </p:txBody>
+      </p:sp>
+      <p:sp>
+        <p:nvSpPr>
+          <p:cNvPr id="4" name="Slide Number Placeholder 3"/>
+          <p:cNvSpPr>
+            <a:spLocks noGrp="1"/>
+          </p:cNvSpPr>
+          <p:nvPr>
+            <p:ph type="sldNum" idx="5" sz="quarter"/>
+          </p:nvPr>
+        </p:nvSpPr>
+        <p:spPr/>
+      </p:sp>
+    </p:spTree>
+  </p:cSld>
+  <p:clrMapOvr>
+    <a:masterClrMapping/>
+  </p:clrMapOvr>
+</p:notes>
+</file>
+
+<file path=ppt/notesSlides/notesSlide12.xml><?xml version="1.0" encoding="utf-8"?>
+<p:notes xmlns:a="http://schemas.openxmlformats.org/drawingml/2006/main" xmlns:p="http://schemas.openxmlformats.org/presentationml/2006/main" xmlns:r="http://schemas.openxmlformats.org/officeDocument/2006/relationships">
+  <p:cSld>
+    <p:spTree>
+      <p:nvGrpSpPr>
+        <p:cNvPr id="1" name=""/>
+        <p:cNvGrpSpPr/>
+        <p:nvPr/>
+      </p:nvGrpSpPr>
+      <p:grpSpPr>
+        <a:xfrm>
+          <a:off x="0" y="0"/>
+          <a:ext cx="0" cy="0"/>
+          <a:chOff x="0" y="0"/>
+          <a:chExt cx="0" cy="0"/>
+        </a:xfrm>
+      </p:grpSpPr>
+      <p:sp>
+        <p:nvSpPr>
+          <p:cNvPr id="2" name="Slide Image Placeholder 1"/>
+          <p:cNvSpPr>
+            <a:spLocks noGrp="1"/>
+          </p:cNvSpPr>
+          <p:nvPr>
+            <p:ph type="sldImg" idx="2"/>
+          </p:nvPr>
+        </p:nvSpPr>
+        <p:spPr/>
+      </p:sp>
+      <p:sp>
+        <p:nvSpPr>
+          <p:cNvPr id="3" name="Notes Placeholder 2"/>
+          <p:cNvSpPr>
+            <a:spLocks noGrp="1"/>
+          </p:cNvSpPr>
+          <p:nvPr>
+            <p:ph type="body" idx="3" sz="quarter"/>
+          </p:nvPr>
+        </p:nvSpPr>
+        <p:spPr/>
+        <p:txBody>
+          <a:bodyPr/>
+          <a:lstStyle/>
+          <a:p>
+            <a:r>
+              <a:t>[Integrante 3 · 0:50]</a:t>
+            </a:r>
+          </a:p>
+          <a:p/>
+          <a:p>
+            <a:r>
+              <a:t>Refuerza el mensaje anterior con evidencia espacial.</a:t>
+            </a:r>
+          </a:p>
+          <a:p/>
+          <a:p>
+            <a:r>
+              <a:t>La idea: no solo los hemisferios difieren, también las bandas de latitud dentro de</a:t>
+            </a:r>
+          </a:p>
+          <a:p>
+            <a:r>
+              <a:t>un mismo hemisferio. Media desviación estándar de diferencia entre la banda</a:t>
+            </a:r>
+          </a:p>
+          <a:p>
+            <a:r>
+              <a:t>tropical norte y la subtropical norte es mucho.</a:t>
+            </a:r>
+          </a:p>
+          <a:p/>
+          <a:p>
+            <a:r>
+              <a:t>El detalle interesante es que la banda tropical norte es a la vez la de menor media</a:t>
+            </a:r>
+          </a:p>
+          <a:p>
+            <a:r>
+              <a:t>y la de mayor rango: la región más seca en promedio es también donde ocurren los</a:t>
+            </a:r>
+          </a:p>
+          <a:p>
+            <a:r>
+              <a:t>eventos más extremos.</a:t>
+            </a:r>
+          </a:p>
+          <a:p/>
+          <a:p>
+            <a:r>
+              <a:t>Aquí termina el tercer bloque: dar paso al último expositor.</a:t>
+            </a:r>
+          </a:p>
+        </p:txBody>
+      </p:sp>
+      <p:sp>
+        <p:nvSpPr>
+          <p:cNvPr id="4" name="Slide Number Placeholder 3"/>
+          <p:cNvSpPr>
+            <a:spLocks noGrp="1"/>
+          </p:cNvSpPr>
+          <p:nvPr>
+            <p:ph type="sldNum" idx="5" sz="quarter"/>
+          </p:nvPr>
+        </p:nvSpPr>
+        <p:spPr/>
+      </p:sp>
+    </p:spTree>
+  </p:cSld>
+  <p:clrMapOvr>
+    <a:masterClrMapping/>
+  </p:clrMapOvr>
+</p:notes>
+</file>
+
+<file path=ppt/notesSlides/notesSlide13.xml><?xml version="1.0" encoding="utf-8"?>
+<p:notes xmlns:a="http://schemas.openxmlformats.org/drawingml/2006/main" xmlns:p="http://schemas.openxmlformats.org/presentationml/2006/main" xmlns:r="http://schemas.openxmlformats.org/officeDocument/2006/relationships">
+  <p:cSld>
+    <p:spTree>
+      <p:nvGrpSpPr>
+        <p:cNvPr id="1" name=""/>
+        <p:cNvGrpSpPr/>
+        <p:nvPr/>
+      </p:nvGrpSpPr>
+      <p:grpSpPr>
+        <a:xfrm>
+          <a:off x="0" y="0"/>
+          <a:ext cx="0" cy="0"/>
+          <a:chOff x="0" y="0"/>
+          <a:chExt cx="0" cy="0"/>
+        </a:xfrm>
+      </p:grpSpPr>
+      <p:sp>
+        <p:nvSpPr>
+          <p:cNvPr id="2" name="Slide Image Placeholder 1"/>
+          <p:cNvSpPr>
+            <a:spLocks noGrp="1"/>
+          </p:cNvSpPr>
+          <p:nvPr>
+            <p:ph type="sldImg" idx="2"/>
+          </p:nvPr>
+        </p:nvSpPr>
+        <p:spPr/>
+      </p:sp>
+      <p:sp>
+        <p:nvSpPr>
+          <p:cNvPr id="3" name="Notes Placeholder 2"/>
+          <p:cNvSpPr>
+            <a:spLocks noGrp="1"/>
+          </p:cNvSpPr>
+          <p:nvPr>
+            <p:ph type="body" idx="3" sz="quarter"/>
+          </p:nvPr>
+        </p:nvSpPr>
+        <p:spPr/>
+        <p:txBody>
+          <a:bodyPr/>
+          <a:lstStyle/>
+          <a:p>
+            <a:r>
+              <a:t>[Integrante 4 · 1:05]</a:t>
+            </a:r>
+          </a:p>
+          <a:p/>
+          <a:p>
+            <a:r>
+              <a:t>Dos mensajes.</a:t>
+            </a:r>
+          </a:p>
+          <a:p/>
+          <a:p>
+            <a:r>
+              <a:t>El primero: la persistencia domina. El mejor predictor del agua del mes siguiente es</a:t>
+            </a:r>
+          </a:p>
+          <a:p>
+            <a:r>
+              <a:t>el agua del mes actual, con 0.803, más del doble que cualquier covariable. El agua</a:t>
+            </a:r>
+          </a:p>
+          <a:p>
+            <a:r>
+              <a:t>almacenada tiene mucha inercia.</a:t>
+            </a:r>
+          </a:p>
+          <a:p/>
+          <a:p>
+            <a:r>
+              <a:t>El segundo es el más interesante y conviene contarlo bien: los cuatro SPEI se</a:t>
+            </a:r>
+          </a:p>
+          <a:p>
+            <a:r>
+              <a:t>ordenan exactamente por su escala de acumulación, de 12 meses a 1 mes. Nosotros</a:t>
+            </a:r>
+          </a:p>
+          <a:p>
+            <a:r>
+              <a:t>habíamos planteado esa expectativa antes de mirar los datos, razonando que el TWS</a:t>
+            </a:r>
+          </a:p>
+          <a:p>
+            <a:r>
+              <a:t>integra agua subterránea, que responde lento. Los datos la confirmaron. Fue una</a:t>
+            </a:r>
+          </a:p>
+          <a:p>
+            <a:r>
+              <a:t>hipótesis verificada, no una suposición.</a:t>
+            </a:r>
+          </a:p>
+          <a:p/>
+          <a:p>
+            <a:r>
+              <a:t>Cerrar con la advertencia de causalidad, que es explícita en la rúbrica.</a:t>
+            </a:r>
+          </a:p>
+        </p:txBody>
+      </p:sp>
+      <p:sp>
+        <p:nvSpPr>
+          <p:cNvPr id="4" name="Slide Number Placeholder 3"/>
+          <p:cNvSpPr>
+            <a:spLocks noGrp="1"/>
+          </p:cNvSpPr>
+          <p:nvPr>
+            <p:ph type="sldNum" idx="5" sz="quarter"/>
+          </p:nvPr>
+        </p:nvSpPr>
+        <p:spPr/>
+      </p:sp>
+    </p:spTree>
+  </p:cSld>
+  <p:clrMapOvr>
+    <a:masterClrMapping/>
+  </p:clrMapOvr>
+</p:notes>
+</file>
+
+<file path=ppt/notesSlides/notesSlide14.xml><?xml version="1.0" encoding="utf-8"?>
+<p:notes xmlns:a="http://schemas.openxmlformats.org/drawingml/2006/main" xmlns:p="http://schemas.openxmlformats.org/presentationml/2006/main" xmlns:r="http://schemas.openxmlformats.org/officeDocument/2006/relationships">
+  <p:cSld>
+    <p:spTree>
+      <p:nvGrpSpPr>
+        <p:cNvPr id="1" name=""/>
+        <p:cNvGrpSpPr/>
+        <p:nvPr/>
+      </p:nvGrpSpPr>
+      <p:grpSpPr>
+        <a:xfrm>
+          <a:off x="0" y="0"/>
+          <a:ext cx="0" cy="0"/>
+          <a:chOff x="0" y="0"/>
+          <a:chExt cx="0" cy="0"/>
+        </a:xfrm>
+      </p:grpSpPr>
+      <p:sp>
+        <p:nvSpPr>
+          <p:cNvPr id="2" name="Slide Image Placeholder 1"/>
+          <p:cNvSpPr>
+            <a:spLocks noGrp="1"/>
+          </p:cNvSpPr>
+          <p:nvPr>
+            <p:ph type="sldImg" idx="2"/>
+          </p:nvPr>
+        </p:nvSpPr>
+        <p:spPr/>
+      </p:sp>
+      <p:sp>
+        <p:nvSpPr>
+          <p:cNvPr id="3" name="Notes Placeholder 2"/>
+          <p:cNvSpPr>
+            <a:spLocks noGrp="1"/>
+          </p:cNvSpPr>
+          <p:nvPr>
+            <p:ph type="body" idx="3" sz="quarter"/>
+          </p:nvPr>
+        </p:nvSpPr>
+        <p:spPr/>
+        <p:txBody>
+          <a:bodyPr/>
+          <a:lstStyle/>
+          <a:p>
+            <a:r>
+              <a:t>[Integrante 4 · 0:55]</a:t>
+            </a:r>
+          </a:p>
+          <a:p/>
+          <a:p>
+            <a:r>
+              <a:t>Es la diapositiva que conecta el EDA con la etapa de modelado.</a:t>
+            </a:r>
+          </a:p>
+          <a:p/>
+          <a:p>
+            <a:r>
+              <a:t>Explicar la idea de línea base: antes de construir algo complejo hay que saber qué</a:t>
+            </a:r>
+          </a:p>
+          <a:p>
+            <a:r>
+              <a:t>tan lejos llega lo trivial. Aquí lo trivial llega bastante lejos, porque el sistema</a:t>
+            </a:r>
+          </a:p>
+          <a:p>
+            <a:r>
+              <a:t>tiene inercia.</a:t>
+            </a:r>
+          </a:p>
+          <a:p/>
+          <a:p>
+            <a:r>
+              <a:t>Señalar la gráfica de la derecha: el RMSE de la persistencia mes a mes. No es</a:t>
+            </a:r>
+          </a:p>
+          <a:p>
+            <a:r>
+              <a:t>constante, lo que sugiere que hay periodos más difíciles de predecir que otros.</a:t>
+            </a:r>
+          </a:p>
+          <a:p/>
+          <a:p>
+            <a:r>
+              <a:t>El número a recordar es 0.5724. Si el modelo del próximo proyecto no baja de ahí,</a:t>
+            </a:r>
+          </a:p>
+          <a:p>
+            <a:r>
+              <a:t>no sirve.</a:t>
+            </a:r>
+          </a:p>
+        </p:txBody>
+      </p:sp>
+      <p:sp>
+        <p:nvSpPr>
+          <p:cNvPr id="4" name="Slide Number Placeholder 3"/>
+          <p:cNvSpPr>
+            <a:spLocks noGrp="1"/>
+          </p:cNvSpPr>
+          <p:nvPr>
+            <p:ph type="sldNum" idx="5" sz="quarter"/>
+          </p:nvPr>
+        </p:nvSpPr>
+        <p:spPr/>
+      </p:sp>
+    </p:spTree>
+  </p:cSld>
+  <p:clrMapOvr>
+    <a:masterClrMapping/>
+  </p:clrMapOvr>
+</p:notes>
+</file>
+
+<file path=ppt/notesSlides/notesSlide15.xml><?xml version="1.0" encoding="utf-8"?>
+<p:notes xmlns:a="http://schemas.openxmlformats.org/drawingml/2006/main" xmlns:p="http://schemas.openxmlformats.org/presentationml/2006/main" xmlns:r="http://schemas.openxmlformats.org/officeDocument/2006/relationships">
+  <p:cSld>
+    <p:spTree>
+      <p:nvGrpSpPr>
+        <p:cNvPr id="1" name=""/>
+        <p:cNvGrpSpPr/>
+        <p:nvPr/>
+      </p:nvGrpSpPr>
+      <p:grpSpPr>
+        <a:xfrm>
+          <a:off x="0" y="0"/>
+          <a:ext cx="0" cy="0"/>
+          <a:chOff x="0" y="0"/>
+          <a:chExt cx="0" cy="0"/>
+        </a:xfrm>
+      </p:grpSpPr>
+      <p:sp>
+        <p:nvSpPr>
+          <p:cNvPr id="2" name="Slide Image Placeholder 1"/>
+          <p:cNvSpPr>
+            <a:spLocks noGrp="1"/>
+          </p:cNvSpPr>
+          <p:nvPr>
+            <p:ph type="sldImg" idx="2"/>
+          </p:nvPr>
+        </p:nvSpPr>
+        <p:spPr/>
+      </p:sp>
+      <p:sp>
+        <p:nvSpPr>
+          <p:cNvPr id="3" name="Notes Placeholder 2"/>
+          <p:cNvSpPr>
+            <a:spLocks noGrp="1"/>
+          </p:cNvSpPr>
+          <p:nvPr>
+            <p:ph type="body" idx="3" sz="quarter"/>
+          </p:nvPr>
+        </p:nvSpPr>
+        <p:spPr/>
+        <p:txBody>
+          <a:bodyPr/>
+          <a:lstStyle/>
+          <a:p>
+            <a:r>
+              <a:t>[Integrante 4 · 0:50]</a:t>
+            </a:r>
+          </a:p>
+          <a:p/>
+          <a:p>
+            <a:r>
+              <a:t>No leer los ocho puntos: la audiencia los tiene en pantalla. Elegir tres y</a:t>
+            </a:r>
+          </a:p>
+          <a:p>
+            <a:r>
+              <a:t>comentarlos.</a:t>
+            </a:r>
+          </a:p>
+          <a:p/>
+          <a:p>
+            <a:r>
+              <a:t>Los que más valor tienen: el de los meses faltantes, porque es el que no detecta</a:t>
+            </a:r>
+          </a:p>
+          <a:p>
+            <a:r>
+              <a:t>ninguna herramienta automática; el de la verificación de la variable objetivo,</a:t>
+            </a:r>
+          </a:p>
+          <a:p>
+            <a:r>
+              <a:t>porque muestra que no confiamos en la documentación sino que lo comprobamos; y el</a:t>
+            </a:r>
+          </a:p>
+          <a:p>
+            <a:r>
+              <a:t>de la estacionalidad, por la lección metodológica.</a:t>
+            </a:r>
+          </a:p>
+          <a:p/>
+          <a:p>
+            <a:r>
+              <a:t>Mencionar que cada hallazgo está respaldado por una tabla o una figura del</a:t>
+            </a:r>
+          </a:p>
+          <a:p>
+            <a:r>
+              <a:t>notebook, que es público en el repositorio.</a:t>
+            </a:r>
+          </a:p>
+        </p:txBody>
+      </p:sp>
+      <p:sp>
+        <p:nvSpPr>
+          <p:cNvPr id="4" name="Slide Number Placeholder 3"/>
+          <p:cNvSpPr>
+            <a:spLocks noGrp="1"/>
+          </p:cNvSpPr>
+          <p:nvPr>
+            <p:ph type="sldNum" idx="5" sz="quarter"/>
+          </p:nvPr>
+        </p:nvSpPr>
+        <p:spPr/>
+      </p:sp>
+    </p:spTree>
+  </p:cSld>
+  <p:clrMapOvr>
+    <a:masterClrMapping/>
+  </p:clrMapOvr>
+</p:notes>
+</file>
+
+<file path=ppt/notesSlides/notesSlide16.xml><?xml version="1.0" encoding="utf-8"?>
+<p:notes xmlns:a="http://schemas.openxmlformats.org/drawingml/2006/main" xmlns:p="http://schemas.openxmlformats.org/presentationml/2006/main" xmlns:r="http://schemas.openxmlformats.org/officeDocument/2006/relationships">
+  <p:cSld>
+    <p:spTree>
+      <p:nvGrpSpPr>
+        <p:cNvPr id="1" name=""/>
+        <p:cNvGrpSpPr/>
+        <p:nvPr/>
+      </p:nvGrpSpPr>
+      <p:grpSpPr>
+        <a:xfrm>
+          <a:off x="0" y="0"/>
+          <a:ext cx="0" cy="0"/>
+          <a:chOff x="0" y="0"/>
+          <a:chExt cx="0" cy="0"/>
+        </a:xfrm>
+      </p:grpSpPr>
+      <p:sp>
+        <p:nvSpPr>
+          <p:cNvPr id="2" name="Slide Image Placeholder 1"/>
+          <p:cNvSpPr>
+            <a:spLocks noGrp="1"/>
+          </p:cNvSpPr>
+          <p:nvPr>
+            <p:ph type="sldImg" idx="2"/>
+          </p:nvPr>
+        </p:nvSpPr>
+        <p:spPr/>
+      </p:sp>
+      <p:sp>
+        <p:nvSpPr>
+          <p:cNvPr id="3" name="Notes Placeholder 2"/>
+          <p:cNvSpPr>
+            <a:spLocks noGrp="1"/>
+          </p:cNvSpPr>
+          <p:nvPr>
+            <p:ph type="body" idx="3" sz="quarter"/>
+          </p:nvPr>
+        </p:nvSpPr>
+        <p:spPr/>
+        <p:txBody>
+          <a:bodyPr/>
+          <a:lstStyle/>
+          <a:p>
+            <a:r>
+              <a:t>[Integrante 4 · 1:00]</a:t>
+            </a:r>
+          </a:p>
+          <a:p/>
+          <a:p>
+            <a:r>
+              <a:t>Cerrar conectando con los objetivos del inicio: los seis se cumplieron y cada uno</a:t>
+            </a:r>
+          </a:p>
+          <a:p>
+            <a:r>
+              <a:t>se retoma explícitamente en las conclusiones del informe.</a:t>
+            </a:r>
+          </a:p>
+          <a:p/>
+          <a:p>
+            <a:r>
+              <a:t>De los próximos pasos, destacar dos. El del enmascaramiento es el más delicado: en</a:t>
+            </a:r>
+          </a:p>
+          <a:p>
+            <a:r>
+              <a:t>el conjunto de prueba, dos tercios de las filas no tienen el TWS del mes actual, y</a:t>
+            </a:r>
+          </a:p>
+          <a:p>
+            <a:r>
+              <a:t>esa es justamente la variable más predictiva. El modelo tendrá que funcionar sin</a:t>
+            </a:r>
+          </a:p>
+          <a:p>
+            <a:r>
+              <a:t>ella la mayor parte del tiempo, y hay que reproducir esa condición al validar.</a:t>
+            </a:r>
+          </a:p>
+          <a:p/>
+          <a:p>
+            <a:r>
+              <a:t>El otro es el de los rezagos, que enlaza con el hallazgo de los meses faltantes.</a:t>
+            </a:r>
+          </a:p>
+          <a:p/>
+          <a:p>
+            <a:r>
+              <a:t>Terminar agradeciendo y abriendo a preguntas.</a:t>
+            </a:r>
+          </a:p>
+        </p:txBody>
+      </p:sp>
+      <p:sp>
+        <p:nvSpPr>
+          <p:cNvPr id="4" name="Slide Number Placeholder 3"/>
+          <p:cNvSpPr>
+            <a:spLocks noGrp="1"/>
+          </p:cNvSpPr>
+          <p:nvPr>
+            <p:ph type="sldNum" idx="5" sz="quarter"/>
+          </p:nvPr>
+        </p:nvSpPr>
+        <p:spPr/>
+      </p:sp>
+    </p:spTree>
+  </p:cSld>
+  <p:clrMapOvr>
+    <a:masterClrMapping/>
+  </p:clrMapOvr>
+</p:notes>
+</file>
+
+<file path=ppt/notesSlides/notesSlide2.xml><?xml version="1.0" encoding="utf-8"?>
+<p:notes xmlns:a="http://schemas.openxmlformats.org/drawingml/2006/main" xmlns:p="http://schemas.openxmlformats.org/presentationml/2006/main" xmlns:r="http://schemas.openxmlformats.org/officeDocument/2006/relationships">
+  <p:cSld>
+    <p:spTree>
+      <p:nvGrpSpPr>
+        <p:cNvPr id="1" name=""/>
+        <p:cNvGrpSpPr/>
+        <p:nvPr/>
+      </p:nvGrpSpPr>
+      <p:grpSpPr>
+        <a:xfrm>
+          <a:off x="0" y="0"/>
+          <a:ext cx="0" cy="0"/>
+          <a:chOff x="0" y="0"/>
+          <a:chExt cx="0" cy="0"/>
+        </a:xfrm>
+      </p:grpSpPr>
+      <p:sp>
+        <p:nvSpPr>
+          <p:cNvPr id="2" name="Slide Image Placeholder 1"/>
+          <p:cNvSpPr>
+            <a:spLocks noGrp="1"/>
+          </p:cNvSpPr>
+          <p:nvPr>
+            <p:ph type="sldImg" idx="2"/>
+          </p:nvPr>
+        </p:nvSpPr>
+        <p:spPr/>
+      </p:sp>
+      <p:sp>
+        <p:nvSpPr>
+          <p:cNvPr id="3" name="Notes Placeholder 2"/>
+          <p:cNvSpPr>
+            <a:spLocks noGrp="1"/>
+          </p:cNvSpPr>
+          <p:nvPr>
+            <p:ph type="body" idx="3" sz="quarter"/>
+          </p:nvPr>
+        </p:nvSpPr>
+        <p:spPr/>
+        <p:txBody>
+          <a:bodyPr/>
+          <a:lstStyle/>
+          <a:p>
+            <a:r>
+              <a:t>[Integrante 1 · 1:00]</a:t>
+            </a:r>
+          </a:p>
+          <a:p/>
+          <a:p>
+            <a:r>
+              <a:t>Es el concepto clave: si no se entiende qué es el TWS, nada del resto se entiende.</a:t>
+            </a:r>
+          </a:p>
+          <a:p/>
+          <a:p>
+            <a:r>
+              <a:t>Insistir en dos cosas. Primero, que no es solo lluvia: es el balance acumulado, e</a:t>
+            </a:r>
+          </a:p>
+          <a:p>
+            <a:r>
+              <a:t>incluye acuíferos. Segundo, el mecanismo de medición, que suele sorprender: el</a:t>
+            </a:r>
+          </a:p>
+          <a:p>
+            <a:r>
+              <a:t>satélite pesa la Tierra, no fotografía el agua.</a:t>
+            </a:r>
+          </a:p>
+          <a:p/>
+          <a:p>
+            <a:r>
+              <a:t>Señalar en el mapa el norte de África y la India en café: son las zonas de menor</a:t>
+            </a:r>
+          </a:p>
+          <a:p>
+            <a:r>
+              <a:t>almacenamiento promedio. Ese mapa lo produjimos nosotros con los datos del reto.</a:t>
+            </a:r>
+          </a:p>
+        </p:txBody>
+      </p:sp>
+      <p:sp>
+        <p:nvSpPr>
+          <p:cNvPr id="4" name="Slide Number Placeholder 3"/>
+          <p:cNvSpPr>
+            <a:spLocks noGrp="1"/>
+          </p:cNvSpPr>
+          <p:nvPr>
+            <p:ph type="sldNum" idx="5" sz="quarter"/>
+          </p:nvPr>
+        </p:nvSpPr>
+        <p:spPr/>
+      </p:sp>
+    </p:spTree>
+  </p:cSld>
+  <p:clrMapOvr>
+    <a:masterClrMapping/>
+  </p:clrMapOvr>
+</p:notes>
+</file>
+
+<file path=ppt/notesSlides/notesSlide3.xml><?xml version="1.0" encoding="utf-8"?>
+<p:notes xmlns:a="http://schemas.openxmlformats.org/drawingml/2006/main" xmlns:p="http://schemas.openxmlformats.org/presentationml/2006/main" xmlns:r="http://schemas.openxmlformats.org/officeDocument/2006/relationships">
+  <p:cSld>
+    <p:spTree>
+      <p:nvGrpSpPr>
+        <p:cNvPr id="1" name=""/>
+        <p:cNvGrpSpPr/>
+        <p:nvPr/>
+      </p:nvGrpSpPr>
+      <p:grpSpPr>
+        <a:xfrm>
+          <a:off x="0" y="0"/>
+          <a:ext cx="0" cy="0"/>
+          <a:chOff x="0" y="0"/>
+          <a:chExt cx="0" cy="0"/>
+        </a:xfrm>
+      </p:grpSpPr>
+      <p:sp>
+        <p:nvSpPr>
+          <p:cNvPr id="2" name="Slide Image Placeholder 1"/>
+          <p:cNvSpPr>
+            <a:spLocks noGrp="1"/>
+          </p:cNvSpPr>
+          <p:nvPr>
+            <p:ph type="sldImg" idx="2"/>
+          </p:nvPr>
+        </p:nvSpPr>
+        <p:spPr/>
+      </p:sp>
+      <p:sp>
+        <p:nvSpPr>
+          <p:cNvPr id="3" name="Notes Placeholder 2"/>
+          <p:cNvSpPr>
+            <a:spLocks noGrp="1"/>
+          </p:cNvSpPr>
+          <p:nvPr>
+            <p:ph type="body" idx="3" sz="quarter"/>
+          </p:nvPr>
+        </p:nvSpPr>
+        <p:spPr/>
+        <p:txBody>
+          <a:bodyPr/>
+          <a:lstStyle/>
+          <a:p>
+            <a:r>
+              <a:t>[Integrante 1 · 0:50]</a:t>
+            </a:r>
+          </a:p>
+          <a:p/>
+          <a:p>
+            <a:r>
+              <a:t>Aquí está la justificación del proyecto entero. Vale la pena decirlo despacio.</a:t>
+            </a:r>
+          </a:p>
+          <a:p/>
+          <a:p>
+            <a:r>
+              <a:t>La idea que debe quedar: el problema no es que falte el dato, es que llega tarde.</a:t>
+            </a:r>
+          </a:p>
+          <a:p>
+            <a:r>
+              <a:t>Un buen ejemplo para dar contexto: si hoy quisiéramos saber si una región está</a:t>
+            </a:r>
+          </a:p>
+          <a:p>
+            <a:r>
+              <a:t>entrando en sequía, el dato satelital más reciente sería el de hace un trimestre.</a:t>
+            </a:r>
+          </a:p>
+          <a:p/>
+          <a:p>
+            <a:r>
+              <a:t>Cerrar mencionando que la métrica es RMSE, porque volverá a aparecer al final</a:t>
+            </a:r>
+          </a:p>
+          <a:p>
+            <a:r>
+              <a:t>cuando hablemos de la línea base.</a:t>
+            </a:r>
+          </a:p>
+        </p:txBody>
+      </p:sp>
+      <p:sp>
+        <p:nvSpPr>
+          <p:cNvPr id="4" name="Slide Number Placeholder 3"/>
+          <p:cNvSpPr>
+            <a:spLocks noGrp="1"/>
+          </p:cNvSpPr>
+          <p:nvPr>
+            <p:ph type="sldNum" idx="5" sz="quarter"/>
+          </p:nvPr>
+        </p:nvSpPr>
+        <p:spPr/>
+      </p:sp>
+    </p:spTree>
+  </p:cSld>
+  <p:clrMapOvr>
+    <a:masterClrMapping/>
+  </p:clrMapOvr>
+</p:notes>
+</file>
+
+<file path=ppt/notesSlides/notesSlide4.xml><?xml version="1.0" encoding="utf-8"?>
+<p:notes xmlns:a="http://schemas.openxmlformats.org/drawingml/2006/main" xmlns:p="http://schemas.openxmlformats.org/presentationml/2006/main" xmlns:r="http://schemas.openxmlformats.org/officeDocument/2006/relationships">
+  <p:cSld>
+    <p:spTree>
+      <p:nvGrpSpPr>
+        <p:cNvPr id="1" name=""/>
+        <p:cNvGrpSpPr/>
+        <p:nvPr/>
+      </p:nvGrpSpPr>
+      <p:grpSpPr>
+        <a:xfrm>
+          <a:off x="0" y="0"/>
+          <a:ext cx="0" cy="0"/>
+          <a:chOff x="0" y="0"/>
+          <a:chExt cx="0" cy="0"/>
+        </a:xfrm>
+      </p:grpSpPr>
+      <p:sp>
+        <p:nvSpPr>
+          <p:cNvPr id="2" name="Slide Image Placeholder 1"/>
+          <p:cNvSpPr>
+            <a:spLocks noGrp="1"/>
+          </p:cNvSpPr>
+          <p:nvPr>
+            <p:ph type="sldImg" idx="2"/>
+          </p:nvPr>
+        </p:nvSpPr>
+        <p:spPr/>
+      </p:sp>
+      <p:sp>
+        <p:nvSpPr>
+          <p:cNvPr id="3" name="Notes Placeholder 2"/>
+          <p:cNvSpPr>
+            <a:spLocks noGrp="1"/>
+          </p:cNvSpPr>
+          <p:nvPr>
+            <p:ph type="body" idx="3" sz="quarter"/>
+          </p:nvPr>
+        </p:nvSpPr>
+        <p:spPr/>
+        <p:txBody>
+          <a:bodyPr/>
+          <a:lstStyle/>
+          <a:p>
+            <a:r>
+              <a:t>[Integrante 1 · 0:50]</a:t>
+            </a:r>
+          </a:p>
+          <a:p/>
+          <a:p>
+            <a:r>
+              <a:t>Leer la pregunta científica completa y pausado; es lo que la rúbrica evalúa.</a:t>
+            </a:r>
+          </a:p>
+          <a:p/>
+          <a:p>
+            <a:r>
+              <a:t>Recalcar el último punto: es un EDA, no un modelo. Decidimos deliberadamente no</a:t>
+            </a:r>
+          </a:p>
+          <a:p>
+            <a:r>
+              <a:t>entrenar nada hasta entender los datos, y eso resultó acertado porque encontramos</a:t>
+            </a:r>
+          </a:p>
+          <a:p>
+            <a:r>
+              <a:t>cosas que habrían arruinado un modelo hecho a ciegas.</a:t>
+            </a:r>
+          </a:p>
+          <a:p/>
+          <a:p>
+            <a:r>
+              <a:t>Cerrar con la advertencia de causalidad. Se repite al final, pero conviene</a:t>
+            </a:r>
+          </a:p>
+          <a:p>
+            <a:r>
+              <a:t>plantarla desde ya.</a:t>
+            </a:r>
+          </a:p>
+          <a:p/>
+          <a:p>
+            <a:r>
+              <a:t>Aquí termina el primer bloque: dar paso al siguiente expositor.</a:t>
+            </a:r>
+          </a:p>
+        </p:txBody>
+      </p:sp>
+      <p:sp>
+        <p:nvSpPr>
+          <p:cNvPr id="4" name="Slide Number Placeholder 3"/>
+          <p:cNvSpPr>
+            <a:spLocks noGrp="1"/>
+          </p:cNvSpPr>
+          <p:nvPr>
+            <p:ph type="sldNum" idx="5" sz="quarter"/>
+          </p:nvPr>
+        </p:nvSpPr>
+        <p:spPr/>
+      </p:sp>
+    </p:spTree>
+  </p:cSld>
+  <p:clrMapOvr>
+    <a:masterClrMapping/>
+  </p:clrMapOvr>
+</p:notes>
+</file>
+
+<file path=ppt/notesSlides/notesSlide5.xml><?xml version="1.0" encoding="utf-8"?>
+<p:notes xmlns:a="http://schemas.openxmlformats.org/drawingml/2006/main" xmlns:p="http://schemas.openxmlformats.org/presentationml/2006/main" xmlns:r="http://schemas.openxmlformats.org/officeDocument/2006/relationships">
+  <p:cSld>
+    <p:spTree>
+      <p:nvGrpSpPr>
+        <p:cNvPr id="1" name=""/>
+        <p:cNvGrpSpPr/>
+        <p:nvPr/>
+      </p:nvGrpSpPr>
+      <p:grpSpPr>
+        <a:xfrm>
+          <a:off x="0" y="0"/>
+          <a:ext cx="0" cy="0"/>
+          <a:chOff x="0" y="0"/>
+          <a:chExt cx="0" cy="0"/>
+        </a:xfrm>
+      </p:grpSpPr>
+      <p:sp>
+        <p:nvSpPr>
+          <p:cNvPr id="2" name="Slide Image Placeholder 1"/>
+          <p:cNvSpPr>
+            <a:spLocks noGrp="1"/>
+          </p:cNvSpPr>
+          <p:nvPr>
+            <p:ph type="sldImg" idx="2"/>
+          </p:nvPr>
+        </p:nvSpPr>
+        <p:spPr/>
+      </p:sp>
+      <p:sp>
+        <p:nvSpPr>
+          <p:cNvPr id="3" name="Notes Placeholder 2"/>
+          <p:cNvSpPr>
+            <a:spLocks noGrp="1"/>
+          </p:cNvSpPr>
+          <p:nvPr>
+            <p:ph type="body" idx="3" sz="quarter"/>
+          </p:nvPr>
+        </p:nvSpPr>
+        <p:spPr/>
+        <p:txBody>
+          <a:bodyPr/>
+          <a:lstStyle/>
+          <a:p>
+            <a:r>
+              <a:t>[Integrante 2 · 0:45]</a:t>
+            </a:r>
+          </a:p>
+          <a:p/>
+          <a:p>
+            <a:r>
+              <a:t>No leer los números uno por uno: son muchos. Quedarse con dos ideas.</a:t>
+            </a:r>
+          </a:p>
+          <a:p/>
+          <a:p>
+            <a:r>
+              <a:t>Primera: es un dataset grande pero simple de forma. Una fila = un mes en una celda</a:t>
+            </a:r>
+          </a:p>
+          <a:p>
+            <a:r>
+              <a:t>de un grado.</a:t>
+            </a:r>
+          </a:p>
+          <a:p/>
+          <a:p>
+            <a:r>
+              <a:t>Segunda, y es la que suele pasarse por alto: las variables vienen estandarizadas.</a:t>
+            </a:r>
+          </a:p>
+          <a:p>
+            <a:r>
+              <a:t>No podemos decir "se perdieron tantos centímetros de agua"; solo podemos hablar de</a:t>
+            </a:r>
+          </a:p>
+          <a:p>
+            <a:r>
+              <a:t>desviaciones relativas. Lo verificamos: la objetivo tiene media 0.11 y desviación</a:t>
+            </a:r>
+          </a:p>
+          <a:p>
+            <a:r>
+              <a:t>0.91, que es la firma de una variable estandarizada.</a:t>
+            </a:r>
+          </a:p>
+        </p:txBody>
+      </p:sp>
+      <p:sp>
+        <p:nvSpPr>
+          <p:cNvPr id="4" name="Slide Number Placeholder 3"/>
+          <p:cNvSpPr>
+            <a:spLocks noGrp="1"/>
+          </p:cNvSpPr>
+          <p:nvPr>
+            <p:ph type="sldNum" idx="5" sz="quarter"/>
+          </p:nvPr>
+        </p:nvSpPr>
+        <p:spPr/>
+      </p:sp>
+    </p:spTree>
+  </p:cSld>
+  <p:clrMapOvr>
+    <a:masterClrMapping/>
+  </p:clrMapOvr>
+</p:notes>
+</file>
+
+<file path=ppt/notesSlides/notesSlide6.xml><?xml version="1.0" encoding="utf-8"?>
+<p:notes xmlns:a="http://schemas.openxmlformats.org/drawingml/2006/main" xmlns:p="http://schemas.openxmlformats.org/presentationml/2006/main" xmlns:r="http://schemas.openxmlformats.org/officeDocument/2006/relationships">
+  <p:cSld>
+    <p:spTree>
+      <p:nvGrpSpPr>
+        <p:cNvPr id="1" name=""/>
+        <p:cNvGrpSpPr/>
+        <p:nvPr/>
+      </p:nvGrpSpPr>
+      <p:grpSpPr>
+        <a:xfrm>
+          <a:off x="0" y="0"/>
+          <a:ext cx="0" cy="0"/>
+          <a:chOff x="0" y="0"/>
+          <a:chExt cx="0" cy="0"/>
+        </a:xfrm>
+      </p:grpSpPr>
+      <p:sp>
+        <p:nvSpPr>
+          <p:cNvPr id="2" name="Slide Image Placeholder 1"/>
+          <p:cNvSpPr>
+            <a:spLocks noGrp="1"/>
+          </p:cNvSpPr>
+          <p:nvPr>
+            <p:ph type="sldImg" idx="2"/>
+          </p:nvPr>
+        </p:nvSpPr>
+        <p:spPr/>
+      </p:sp>
+      <p:sp>
+        <p:nvSpPr>
+          <p:cNvPr id="3" name="Notes Placeholder 2"/>
+          <p:cNvSpPr>
+            <a:spLocks noGrp="1"/>
+          </p:cNvSpPr>
+          <p:nvPr>
+            <p:ph type="body" idx="3" sz="quarter"/>
+          </p:nvPr>
+        </p:nvSpPr>
+        <p:spPr/>
+        <p:txBody>
+          <a:bodyPr/>
+          <a:lstStyle/>
+          <a:p>
+            <a:r>
+              <a:t>[Integrante 2 · 1:20]</a:t>
+            </a:r>
+          </a:p>
+          <a:p/>
+          <a:p>
+            <a:r>
+              <a:t>Este es el hallazgo del que más orgullosos estamos. Darle tiempo.</a:t>
+            </a:r>
+          </a:p>
+          <a:p/>
+          <a:p>
+            <a:r>
+              <a:t>Contarlo como historia: corrimos el chequeo estándar de calidad, salió impecable,</a:t>
+            </a:r>
+          </a:p>
+          <a:p>
+            <a:r>
+              <a:t>y por poco damos el dataset por bueno. Al comparar contra el calendario completo</a:t>
+            </a:r>
+          </a:p>
+          <a:p>
+            <a:r>
+              <a:t>apareció que faltaban 22 meses enteros.</a:t>
+            </a:r>
+          </a:p>
+          <a:p/>
+          <a:p>
+            <a:r>
+              <a:t>La explicación del porqué es lo importante: en formato plano, un mes sin observar</a:t>
+            </a:r>
+          </a:p>
+          <a:p>
+            <a:r>
+              <a:t>desaparece en lugar de aparecer como nulo. Ninguna herramienta de perfilado</a:t>
+            </a:r>
+          </a:p>
+          <a:p>
+            <a:r>
+              <a:t>automático lo detecta.</a:t>
+            </a:r>
+          </a:p>
+          <a:p/>
+          <a:p>
+            <a:r>
+              <a:t>Señalar en la gráfica las barras de 2011 a 2014, que pierden entre 4 y 5 meses</a:t>
+            </a:r>
+          </a:p>
+          <a:p>
+            <a:r>
+              <a:t>cada una. Coincide con los últimos años de operación de GRACE, aunque esa</a:t>
+            </a:r>
+          </a:p>
+          <a:p>
+            <a:r>
+              <a:t>atribución viene de literatura externa, no de nuestros datos.</a:t>
+            </a:r>
+          </a:p>
+          <a:p/>
+          <a:p>
+            <a:r>
+              <a:t>Cerrar con la consecuencia práctica: al construir rezagos para el modelo, un</a:t>
+            </a:r>
+          </a:p>
+          <a:p>
+            <a:r>
+              <a:t>shift() ingenuo daría rezagos falsos, porque el registro anterior de una celda no</a:t>
+            </a:r>
+          </a:p>
+          <a:p>
+            <a:r>
+              <a:t>siempre es el mes anterior.</a:t>
+            </a:r>
+          </a:p>
+        </p:txBody>
+      </p:sp>
+      <p:sp>
+        <p:nvSpPr>
+          <p:cNvPr id="4" name="Slide Number Placeholder 3"/>
+          <p:cNvSpPr>
+            <a:spLocks noGrp="1"/>
+          </p:cNvSpPr>
+          <p:nvPr>
+            <p:ph type="sldNum" idx="5" sz="quarter"/>
+          </p:nvPr>
+        </p:nvSpPr>
+        <p:spPr/>
+      </p:sp>
+    </p:spTree>
+  </p:cSld>
+  <p:clrMapOvr>
+    <a:masterClrMapping/>
+  </p:clrMapOvr>
+</p:notes>
+</file>
+
+<file path=ppt/notesSlides/notesSlide7.xml><?xml version="1.0" encoding="utf-8"?>
+<p:notes xmlns:a="http://schemas.openxmlformats.org/drawingml/2006/main" xmlns:p="http://schemas.openxmlformats.org/presentationml/2006/main" xmlns:r="http://schemas.openxmlformats.org/officeDocument/2006/relationships">
+  <p:cSld>
+    <p:spTree>
+      <p:nvGrpSpPr>
+        <p:cNvPr id="1" name=""/>
+        <p:cNvGrpSpPr/>
+        <p:nvPr/>
+      </p:nvGrpSpPr>
+      <p:grpSpPr>
+        <a:xfrm>
+          <a:off x="0" y="0"/>
+          <a:ext cx="0" cy="0"/>
+          <a:chOff x="0" y="0"/>
+          <a:chExt cx="0" cy="0"/>
+        </a:xfrm>
+      </p:grpSpPr>
+      <p:sp>
+        <p:nvSpPr>
+          <p:cNvPr id="2" name="Slide Image Placeholder 1"/>
+          <p:cNvSpPr>
+            <a:spLocks noGrp="1"/>
+          </p:cNvSpPr>
+          <p:nvPr>
+            <p:ph type="sldImg" idx="2"/>
+          </p:nvPr>
+        </p:nvSpPr>
+        <p:spPr/>
+      </p:sp>
+      <p:sp>
+        <p:nvSpPr>
+          <p:cNvPr id="3" name="Notes Placeholder 2"/>
+          <p:cNvSpPr>
+            <a:spLocks noGrp="1"/>
+          </p:cNvSpPr>
+          <p:nvPr>
+            <p:ph type="body" idx="3" sz="quarter"/>
+          </p:nvPr>
+        </p:nvSpPr>
+        <p:spPr/>
+        <p:txBody>
+          <a:bodyPr/>
+          <a:lstStyle/>
+          <a:p>
+            <a:r>
+              <a:t>[Integrante 2 · 0:40]</a:t>
+            </a:r>
+          </a:p>
+          <a:p/>
+          <a:p>
+            <a:r>
+              <a:t>Diapositiva rápida, no hace falta detenerse.</a:t>
+            </a:r>
+          </a:p>
+          <a:p/>
+          <a:p>
+            <a:r>
+              <a:t>El mensaje es que no hubo sorpresas: las distribuciones se comportan como se espera</a:t>
+            </a:r>
+          </a:p>
+          <a:p>
+            <a:r>
+              <a:t>de índices estandarizados, sin colas patológicas ni bimodalidad.</a:t>
+            </a:r>
+          </a:p>
+          <a:p/>
+          <a:p>
+            <a:r>
+              <a:t>La única que vale señalar es la humedad del suelo, abajo a la izquierda: pico</a:t>
+            </a:r>
+          </a:p>
+          <a:p>
+            <a:r>
+              <a:t>central mucho más alto y estrecho. Eso anticipa la siguiente diapositiva, porque</a:t>
+            </a:r>
+          </a:p>
+          <a:p>
+            <a:r>
+              <a:t>será la variable con más atípicos.</a:t>
+            </a:r>
+          </a:p>
+        </p:txBody>
+      </p:sp>
+      <p:sp>
+        <p:nvSpPr>
+          <p:cNvPr id="4" name="Slide Number Placeholder 3"/>
+          <p:cNvSpPr>
+            <a:spLocks noGrp="1"/>
+          </p:cNvSpPr>
+          <p:nvPr>
+            <p:ph type="sldNum" idx="5" sz="quarter"/>
+          </p:nvPr>
+        </p:nvSpPr>
+        <p:spPr/>
+      </p:sp>
+    </p:spTree>
+  </p:cSld>
+  <p:clrMapOvr>
+    <a:masterClrMapping/>
+  </p:clrMapOvr>
+</p:notes>
+</file>
+
+<file path=ppt/notesSlides/notesSlide8.xml><?xml version="1.0" encoding="utf-8"?>
+<p:notes xmlns:a="http://schemas.openxmlformats.org/drawingml/2006/main" xmlns:p="http://schemas.openxmlformats.org/presentationml/2006/main" xmlns:r="http://schemas.openxmlformats.org/officeDocument/2006/relationships">
+  <p:cSld>
+    <p:spTree>
+      <p:nvGrpSpPr>
+        <p:cNvPr id="1" name=""/>
+        <p:cNvGrpSpPr/>
+        <p:nvPr/>
+      </p:nvGrpSpPr>
+      <p:grpSpPr>
+        <a:xfrm>
+          <a:off x="0" y="0"/>
+          <a:ext cx="0" cy="0"/>
+          <a:chOff x="0" y="0"/>
+          <a:chExt cx="0" cy="0"/>
+        </a:xfrm>
+      </p:grpSpPr>
+      <p:sp>
+        <p:nvSpPr>
+          <p:cNvPr id="2" name="Slide Image Placeholder 1"/>
+          <p:cNvSpPr>
+            <a:spLocks noGrp="1"/>
+          </p:cNvSpPr>
+          <p:nvPr>
+            <p:ph type="sldImg" idx="2"/>
+          </p:nvPr>
+        </p:nvSpPr>
+        <p:spPr/>
+      </p:sp>
+      <p:sp>
+        <p:nvSpPr>
+          <p:cNvPr id="3" name="Notes Placeholder 2"/>
+          <p:cNvSpPr>
+            <a:spLocks noGrp="1"/>
+          </p:cNvSpPr>
+          <p:nvPr>
+            <p:ph type="body" idx="3" sz="quarter"/>
+          </p:nvPr>
+        </p:nvSpPr>
+        <p:spPr/>
+        <p:txBody>
+          <a:bodyPr/>
+          <a:lstStyle/>
+          <a:p>
+            <a:r>
+              <a:t>[Integrante 2 · 1:00]</a:t>
+            </a:r>
+          </a:p>
+          <a:p/>
+          <a:p>
+            <a:r>
+              <a:t>Es una diapositiva de criterio, no de resultado. La rúbrica pide explicar los</a:t>
+            </a:r>
+          </a:p>
+          <a:p>
+            <a:r>
+              <a:t>atípicos, y la respuesta correcta aquí es no tocarlos.</a:t>
+            </a:r>
+          </a:p>
+          <a:p/>
+          <a:p>
+            <a:r>
+              <a:t>El argumento más fuerte es el segundo: si fueran errores de medición, estarían</a:t>
+            </a:r>
+          </a:p>
+          <a:p>
+            <a:r>
+              <a:t>repartidos al azar. Se agrupan en años y regiones concretos, y eso es lo que hace</a:t>
+            </a:r>
+          </a:p>
+          <a:p>
+            <a:r>
+              <a:t>un evento hidrológico real.</a:t>
+            </a:r>
+          </a:p>
+          <a:p/>
+          <a:p>
+            <a:r>
+              <a:t>Mencionar también la limitación del método IQR: marca lo que está lejos del grueso</a:t>
+            </a:r>
+          </a:p>
+          <a:p>
+            <a:r>
+              <a:t>de la distribución, no lo que está mal. Por eso la humedad del suelo, que es muy</a:t>
+            </a:r>
+          </a:p>
+          <a:p>
+            <a:r>
+              <a:t>concentrada, sale con diez veces más atípicos sin que eso signifique más errores.</a:t>
+            </a:r>
+          </a:p>
+          <a:p/>
+          <a:p>
+            <a:r>
+              <a:t>Aquí termina el segundo bloque: dar paso al siguiente expositor.</a:t>
+            </a:r>
+          </a:p>
+        </p:txBody>
+      </p:sp>
+      <p:sp>
+        <p:nvSpPr>
+          <p:cNvPr id="4" name="Slide Number Placeholder 3"/>
+          <p:cNvSpPr>
+            <a:spLocks noGrp="1"/>
+          </p:cNvSpPr>
+          <p:nvPr>
+            <p:ph type="sldNum" idx="5" sz="quarter"/>
+          </p:nvPr>
+        </p:nvSpPr>
+        <p:spPr/>
+      </p:sp>
+    </p:spTree>
+  </p:cSld>
+  <p:clrMapOvr>
+    <a:masterClrMapping/>
+  </p:clrMapOvr>
+</p:notes>
+</file>
+
+<file path=ppt/notesSlides/notesSlide9.xml><?xml version="1.0" encoding="utf-8"?>
+<p:notes xmlns:a="http://schemas.openxmlformats.org/drawingml/2006/main" xmlns:p="http://schemas.openxmlformats.org/presentationml/2006/main" xmlns:r="http://schemas.openxmlformats.org/officeDocument/2006/relationships">
+  <p:cSld>
+    <p:spTree>
+      <p:nvGrpSpPr>
+        <p:cNvPr id="1" name=""/>
+        <p:cNvGrpSpPr/>
+        <p:nvPr/>
+      </p:nvGrpSpPr>
+      <p:grpSpPr>
+        <a:xfrm>
+          <a:off x="0" y="0"/>
+          <a:ext cx="0" cy="0"/>
+          <a:chOff x="0" y="0"/>
+          <a:chExt cx="0" cy="0"/>
+        </a:xfrm>
+      </p:grpSpPr>
+      <p:sp>
+        <p:nvSpPr>
+          <p:cNvPr id="2" name="Slide Image Placeholder 1"/>
+          <p:cNvSpPr>
+            <a:spLocks noGrp="1"/>
+          </p:cNvSpPr>
+          <p:nvPr>
+            <p:ph type="sldImg" idx="2"/>
+          </p:nvPr>
+        </p:nvSpPr>
+        <p:spPr/>
+      </p:sp>
+      <p:sp>
+        <p:nvSpPr>
+          <p:cNvPr id="3" name="Notes Placeholder 2"/>
+          <p:cNvSpPr>
+            <a:spLocks noGrp="1"/>
+          </p:cNvSpPr>
+          <p:nvPr>
+            <p:ph type="body" idx="3" sz="quarter"/>
+          </p:nvPr>
+        </p:nvSpPr>
+        <p:spPr/>
+        <p:txBody>
+          <a:bodyPr/>
+          <a:lstStyle/>
+          <a:p>
+            <a:r>
+              <a:t>[Integrante 3 · 1:05]</a:t>
+            </a:r>
+          </a:p>
+          <a:p/>
+          <a:p>
+            <a:r>
+              <a:t>Señalar la línea roja: es la media móvil de 12 meses. Explicar por qué 12 y no otro</a:t>
+            </a:r>
+          </a:p>
+          <a:p>
+            <a:r>
+              <a:t>número — los datos son mensuales y el ciclo esperado es anual, así que una ventana</a:t>
+            </a:r>
+          </a:p>
+          <a:p>
+            <a:r>
+              <a:t>de 12 promedia un ciclo completo y cancela la estacionalidad, dejando ver la</a:t>
+            </a:r>
+          </a:p>
+          <a:p>
+            <a:r>
+              <a:t>tendencia.</a:t>
+            </a:r>
+          </a:p>
+          <a:p/>
+          <a:p>
+            <a:r>
+              <a:t>La caída es visible a simple vista: arranca alrededor de 0.3 en 2004 y termina en</a:t>
+            </a:r>
+          </a:p>
+          <a:p>
+            <a:r>
+              <a:t>negativo.</a:t>
+            </a:r>
+          </a:p>
+          <a:p/>
+          <a:p>
+            <a:r>
+              <a:t>Explicar el Dickey-Fuller en términos sencillos: es una prueba de si la serie tiene</a:t>
+            </a:r>
+          </a:p>
+          <a:p>
+            <a:r>
+              <a:t>un nivel estable al que regresa. Con p = 0.53 no podemos afirmar que lo tenga, lo</a:t>
+            </a:r>
+          </a:p>
+          <a:p>
+            <a:r>
+              <a:t>cual es coherente con ver una tendencia.</a:t>
+            </a:r>
+          </a:p>
+          <a:p/>
+          <a:p>
+            <a:r>
+              <a:t>Anticipar la consecuencia: para modelar habrá que diferenciar la serie o incorporar</a:t>
+            </a:r>
+          </a:p>
+          <a:p>
+            <a:r>
+              <a:t>la tendencia de forma explícita.</a:t>
+            </a:r>
+          </a:p>
+        </p:txBody>
+      </p:sp>
+      <p:sp>
+        <p:nvSpPr>
+          <p:cNvPr id="4" name="Slide Number Placeholder 3"/>
+          <p:cNvSpPr>
+            <a:spLocks noGrp="1"/>
+          </p:cNvSpPr>
+          <p:nvPr>
+            <p:ph type="sldNum" idx="5" sz="quarter"/>
+          </p:nvPr>
+        </p:nvSpPr>
+        <p:spPr/>
+      </p:sp>
+    </p:spTree>
+  </p:cSld>
+  <p:clrMapOvr>
+    <a:masterClrMapping/>
+  </p:clrMapOvr>
+</p:notes>
 </file>
 
 <file path=ppt/slideLayouts/slideLayout1.xml><?xml version="1.0" encoding="utf-8"?>
@@ -3218,8 +5412,8 @@
         </p:nvSpPr>
         <p:spPr>
           <a:xfrm>
-            <a:off x="548640" y="320040"/>
-            <a:ext cx="11094415" cy="822960"/>
+            <a:off x="548640" y="274320"/>
+            <a:ext cx="11094415" cy="731520"/>
           </a:xfrm>
           <a:prstGeom prst="rect">
             <a:avLst/>
@@ -3233,14 +5427,224 @@
           <a:lstStyle/>
           <a:p>
             <a:pPr>
-              <a:defRPr sz="3200" b="1">
+              <a:defRPr sz="3000" b="1">
                 <a:solidFill>
                   <a:srgbClr val="1F3A5F"/>
                 </a:solidFill>
               </a:defRPr>
             </a:pPr>
             <a:r>
-              <a:t>Conclusiones y próximos pasos</a:t>
+              <a:t>Descomposición: ¿dónde está la variabilidad?</a:t>
+            </a:r>
+          </a:p>
+        </p:txBody>
+      </p:sp>
+      <p:pic>
+        <p:nvPicPr>
+          <p:cNvPr id="3" name="Picture 2" descr="17_descomposicion.png"/>
+          <p:cNvPicPr>
+            <a:picLocks noChangeAspect="1"/>
+          </p:cNvPicPr>
+          <p:nvPr/>
+        </p:nvPicPr>
+        <p:blipFill>
+          <a:blip r:embed="rId2"/>
+          <a:stretch>
+            <a:fillRect/>
+          </a:stretch>
+        </p:blipFill>
+        <p:spPr>
+          <a:xfrm>
+            <a:off x="640080" y="1188720"/>
+            <a:ext cx="6400800" cy="4209613"/>
+          </a:xfrm>
+          <a:prstGeom prst="rect">
+            <a:avLst/>
+          </a:prstGeom>
+        </p:spPr>
+      </p:pic>
+      <p:sp>
+        <p:nvSpPr>
+          <p:cNvPr id="4" name="TextBox 3"/>
+          <p:cNvSpPr txBox="1"/>
+          <p:nvPr/>
+        </p:nvSpPr>
+        <p:spPr>
+          <a:xfrm>
+            <a:off x="7223760" y="1554480"/>
+            <a:ext cx="4480560" cy="4023360"/>
+          </a:xfrm>
+          <a:prstGeom prst="rect">
+            <a:avLst/>
+          </a:prstGeom>
+          <a:noFill/>
+        </p:spPr>
+        <p:txBody>
+          <a:bodyPr wrap="square">
+            <a:spAutoFit/>
+          </a:bodyPr>
+          <a:lstStyle/>
+          <a:p>
+            <a:pPr>
+              <a:spcAft>
+                <a:spcPts val="800"/>
+              </a:spcAft>
+              <a:defRPr sz="1500">
+                <a:solidFill>
+                  <a:srgbClr val="444A52"/>
+                </a:solidFill>
+              </a:defRPr>
+            </a:pPr>
+            <a:r>
+              <a:t>•  La serie se separa en tendencia, estacionalidad y residuo.</a:t>
+            </a:r>
+          </a:p>
+          <a:p>
+            <a:pPr>
+              <a:spcAft>
+                <a:spcPts val="800"/>
+              </a:spcAft>
+              <a:defRPr sz="1500">
+                <a:solidFill>
+                  <a:srgbClr val="444A52"/>
+                </a:solidFill>
+              </a:defRPr>
+            </a:pPr>
+            <a:r>
+              <a:t>•  Tendencia:  64 % de la varianza</a:t>
+            </a:r>
+          </a:p>
+          <a:p>
+            <a:pPr>
+              <a:spcAft>
+                <a:spcPts val="800"/>
+              </a:spcAft>
+              <a:defRPr sz="1500">
+                <a:solidFill>
+                  <a:srgbClr val="444A52"/>
+                </a:solidFill>
+              </a:defRPr>
+            </a:pPr>
+            <a:r>
+              <a:t>•  Residuo:  18 %</a:t>
+            </a:r>
+          </a:p>
+          <a:p>
+            <a:pPr>
+              <a:spcAft>
+                <a:spcPts val="800"/>
+              </a:spcAft>
+              <a:defRPr sz="1500">
+                <a:solidFill>
+                  <a:srgbClr val="444A52"/>
+                </a:solidFill>
+              </a:defRPr>
+            </a:pPr>
+            <a:r>
+              <a:t>•  Estacionalidad:  3 %</a:t>
+            </a:r>
+          </a:p>
+          <a:p>
+            <a:pPr>
+              <a:spcAft>
+                <a:spcPts val="800"/>
+              </a:spcAft>
+              <a:defRPr sz="1500">
+                <a:solidFill>
+                  <a:srgbClr val="444A52"/>
+                </a:solidFill>
+              </a:defRPr>
+            </a:pPr>
+            <a:r>
+              <a:t>•  El ciclo anual casi no aparece en la serie global. Ese resultado nos sorprendió y motivó la siguiente diapositiva.</a:t>
+            </a:r>
+          </a:p>
+        </p:txBody>
+      </p:sp>
+      <p:sp>
+        <p:nvSpPr>
+          <p:cNvPr id="5" name="TextBox 4"/>
+          <p:cNvSpPr txBox="1"/>
+          <p:nvPr/>
+        </p:nvSpPr>
+        <p:spPr>
+          <a:xfrm>
+            <a:off x="640080" y="6144768"/>
+            <a:ext cx="10911535" cy="502920"/>
+          </a:xfrm>
+          <a:prstGeom prst="rect">
+            <a:avLst/>
+          </a:prstGeom>
+          <a:noFill/>
+        </p:spPr>
+        <p:txBody>
+          <a:bodyPr wrap="none">
+            <a:spAutoFit/>
+          </a:bodyPr>
+          <a:lstStyle/>
+          <a:p>
+            <a:pPr>
+              <a:defRPr sz="1500" i="1" b="1">
+                <a:solidFill>
+                  <a:srgbClr val="0F6E63"/>
+                </a:solidFill>
+              </a:defRPr>
+            </a:pPr>
+            <a:r>
+              <a:t>La tendencia manda; el ciclo anual, en apariencia, casi no existe.</a:t>
+            </a:r>
+          </a:p>
+        </p:txBody>
+      </p:sp>
+    </p:spTree>
+  </p:cSld>
+  <p:clrMapOvr>
+    <a:masterClrMapping/>
+  </p:clrMapOvr>
+</p:sld>
+</file>
+
+<file path=ppt/slides/slide11.xml><?xml version="1.0" encoding="utf-8"?>
+<p:sld xmlns:a="http://schemas.openxmlformats.org/drawingml/2006/main" xmlns:p="http://schemas.openxmlformats.org/presentationml/2006/main" xmlns:r="http://schemas.openxmlformats.org/officeDocument/2006/relationships">
+  <p:cSld>
+    <p:spTree>
+      <p:nvGrpSpPr>
+        <p:cNvPr id="1" name=""/>
+        <p:cNvGrpSpPr/>
+        <p:nvPr/>
+      </p:nvGrpSpPr>
+      <p:grpSpPr/>
+      <p:sp>
+        <p:nvSpPr>
+          <p:cNvPr id="2" name="TextBox 1"/>
+          <p:cNvSpPr txBox="1"/>
+          <p:nvPr/>
+        </p:nvSpPr>
+        <p:spPr>
+          <a:xfrm>
+            <a:off x="548640" y="274320"/>
+            <a:ext cx="11094415" cy="731520"/>
+          </a:xfrm>
+          <a:prstGeom prst="rect">
+            <a:avLst/>
+          </a:prstGeom>
+          <a:noFill/>
+        </p:spPr>
+        <p:txBody>
+          <a:bodyPr wrap="none">
+            <a:spAutoFit/>
+          </a:bodyPr>
+          <a:lstStyle/>
+          <a:p>
+            <a:pPr>
+              <a:defRPr sz="3000" b="1">
+                <a:solidFill>
+                  <a:srgbClr val="1F3A5F"/>
+                </a:solidFill>
+              </a:defRPr>
+            </a:pPr>
+            <a:r>
+              <a:t>La estacionalidad que casi no vemos</a:t>
             </a:r>
           </a:p>
         </p:txBody>
@@ -3253,7 +5657,1126 @@
         </p:nvSpPr>
         <p:spPr>
           <a:xfrm>
+            <a:off x="640080" y="1143000"/>
+            <a:ext cx="10911535" cy="4023360"/>
+          </a:xfrm>
+          <a:prstGeom prst="rect">
+            <a:avLst/>
+          </a:prstGeom>
+          <a:noFill/>
+        </p:spPr>
+        <p:txBody>
+          <a:bodyPr wrap="square">
+            <a:spAutoFit/>
+          </a:bodyPr>
+          <a:lstStyle/>
+          <a:p>
+            <a:pPr>
+              <a:spcAft>
+                <a:spcPts val="800"/>
+              </a:spcAft>
+              <a:defRPr sz="1500">
+                <a:solidFill>
+                  <a:srgbClr val="444A52"/>
+                </a:solidFill>
+              </a:defRPr>
+            </a:pPr>
+            <a:r>
+              <a:t>•  La causa: los hemisferios tienen ciclos opuestos y se cancelan al promediarse.</a:t>
+            </a:r>
+          </a:p>
+          <a:p>
+            <a:pPr>
+              <a:spcAft>
+                <a:spcPts val="800"/>
+              </a:spcAft>
+              <a:defRPr sz="1500">
+                <a:solidFill>
+                  <a:srgbClr val="444A52"/>
+                </a:solidFill>
+              </a:defRPr>
+            </a:pPr>
+            <a:r>
+              <a:t>•  El hemisferio norte promedia positivo los doce meses; el sur cae hasta −0.105 en junio.</a:t>
+            </a:r>
+          </a:p>
+          <a:p>
+            <a:pPr>
+              <a:spcAft>
+                <a:spcPts val="800"/>
+              </a:spcAft>
+              <a:defRPr sz="1500">
+                <a:solidFill>
+                  <a:srgbClr val="444A52"/>
+                </a:solidFill>
+              </a:defRPr>
+            </a:pPr>
+            <a:r>
+              <a:t>•  Además el conjunto está desbalanceado: el 80.3 % de las celdas están en el norte.</a:t>
+            </a:r>
+          </a:p>
+        </p:txBody>
+      </p:sp>
+      <p:pic>
+        <p:nvPicPr>
+          <p:cNvPr id="4" name="Picture 3" descr="17_perfil_estacional.png"/>
+          <p:cNvPicPr>
+            <a:picLocks noChangeAspect="1"/>
+          </p:cNvPicPr>
+          <p:nvPr/>
+        </p:nvPicPr>
+        <p:blipFill>
+          <a:blip r:embed="rId2"/>
+          <a:stretch>
+            <a:fillRect/>
+          </a:stretch>
+        </p:blipFill>
+        <p:spPr>
+          <a:xfrm>
+            <a:off x="1280160" y="2651760"/>
+            <a:ext cx="9601200" cy="2948697"/>
+          </a:xfrm>
+          <a:prstGeom prst="rect">
+            <a:avLst/>
+          </a:prstGeom>
+        </p:spPr>
+      </p:pic>
+      <p:sp>
+        <p:nvSpPr>
+          <p:cNvPr id="5" name="TextBox 4"/>
+          <p:cNvSpPr txBox="1"/>
+          <p:nvPr/>
+        </p:nvSpPr>
+        <p:spPr>
+          <a:xfrm>
+            <a:off x="640080" y="6144768"/>
+            <a:ext cx="10911535" cy="502920"/>
+          </a:xfrm>
+          <a:prstGeom prst="rect">
+            <a:avLst/>
+          </a:prstGeom>
+          <a:noFill/>
+        </p:spPr>
+        <p:txBody>
+          <a:bodyPr wrap="none">
+            <a:spAutoFit/>
+          </a:bodyPr>
+          <a:lstStyle/>
+          <a:p>
+            <a:pPr>
+              <a:defRPr sz="1500" i="1" b="1">
+                <a:solidFill>
+                  <a:srgbClr val="0F6E63"/>
+                </a:solidFill>
+              </a:defRPr>
+            </a:pPr>
+            <a:r>
+              <a:t>Promediar el planeta entero borra el fenómeno. Hay que mirar por región.</a:t>
+            </a:r>
+          </a:p>
+        </p:txBody>
+      </p:sp>
+    </p:spTree>
+  </p:cSld>
+  <p:clrMapOvr>
+    <a:masterClrMapping/>
+  </p:clrMapOvr>
+</p:sld>
+</file>
+
+<file path=ppt/slides/slide12.xml><?xml version="1.0" encoding="utf-8"?>
+<p:sld xmlns:a="http://schemas.openxmlformats.org/drawingml/2006/main" xmlns:p="http://schemas.openxmlformats.org/presentationml/2006/main" xmlns:r="http://schemas.openxmlformats.org/officeDocument/2006/relationships">
+  <p:cSld>
+    <p:spTree>
+      <p:nvGrpSpPr>
+        <p:cNvPr id="1" name=""/>
+        <p:cNvGrpSpPr/>
+        <p:nvPr/>
+      </p:nvGrpSpPr>
+      <p:grpSpPr/>
+      <p:sp>
+        <p:nvSpPr>
+          <p:cNvPr id="2" name="TextBox 1"/>
+          <p:cNvSpPr txBox="1"/>
+          <p:nvPr/>
+        </p:nvSpPr>
+        <p:spPr>
+          <a:xfrm>
+            <a:off x="548640" y="274320"/>
+            <a:ext cx="11094415" cy="731520"/>
+          </a:xfrm>
+          <a:prstGeom prst="rect">
+            <a:avLst/>
+          </a:prstGeom>
+          <a:noFill/>
+        </p:spPr>
+        <p:txBody>
+          <a:bodyPr wrap="none">
+            <a:spAutoFit/>
+          </a:bodyPr>
+          <a:lstStyle/>
+          <a:p>
+            <a:pPr>
+              <a:defRPr sz="3000" b="1">
+                <a:solidFill>
+                  <a:srgbClr val="1F3A5F"/>
+                </a:solidFill>
+              </a:defRPr>
+            </a:pPr>
+            <a:r>
+              <a:t>Cada región se comporta distinto</a:t>
+            </a:r>
+          </a:p>
+        </p:txBody>
+      </p:sp>
+      <p:pic>
+        <p:nvPicPr>
+          <p:cNvPr id="3" name="Picture 2" descr="18_series_por_banda.png"/>
+          <p:cNvPicPr>
+            <a:picLocks noChangeAspect="1"/>
+          </p:cNvPicPr>
+          <p:nvPr/>
+        </p:nvPicPr>
+        <p:blipFill>
+          <a:blip r:embed="rId2"/>
+          <a:stretch>
+            <a:fillRect/>
+          </a:stretch>
+        </p:blipFill>
+        <p:spPr>
+          <a:xfrm>
             <a:off x="640080" y="1234440"/>
+            <a:ext cx="6583680" cy="3063834"/>
+          </a:xfrm>
+          <a:prstGeom prst="rect">
+            <a:avLst/>
+          </a:prstGeom>
+        </p:spPr>
+      </p:pic>
+      <p:sp>
+        <p:nvSpPr>
+          <p:cNvPr id="4" name="TextBox 3"/>
+          <p:cNvSpPr txBox="1"/>
+          <p:nvPr/>
+        </p:nvSpPr>
+        <p:spPr>
+          <a:xfrm>
+            <a:off x="7406640" y="1554480"/>
+            <a:ext cx="4297680" cy="4023360"/>
+          </a:xfrm>
+          <a:prstGeom prst="rect">
+            <a:avLst/>
+          </a:prstGeom>
+          <a:noFill/>
+        </p:spPr>
+        <p:txBody>
+          <a:bodyPr wrap="square">
+            <a:spAutoFit/>
+          </a:bodyPr>
+          <a:lstStyle/>
+          <a:p>
+            <a:pPr>
+              <a:spcAft>
+                <a:spcPts val="800"/>
+              </a:spcAft>
+              <a:defRPr sz="1300">
+                <a:solidFill>
+                  <a:srgbClr val="444A52"/>
+                </a:solidFill>
+              </a:defRPr>
+            </a:pPr>
+            <a:r>
+              <a:t>•  Tropical norte: media −0.222, la más baja.</a:t>
+            </a:r>
+          </a:p>
+          <a:p>
+            <a:pPr>
+              <a:spcAft>
+                <a:spcPts val="800"/>
+              </a:spcAft>
+              <a:defRPr sz="1300">
+                <a:solidFill>
+                  <a:srgbClr val="444A52"/>
+                </a:solidFill>
+              </a:defRPr>
+            </a:pPr>
+            <a:r>
+              <a:t>•  Subtropical norte: 0.327, la más alta.</a:t>
+            </a:r>
+          </a:p>
+          <a:p>
+            <a:pPr>
+              <a:spcAft>
+                <a:spcPts val="800"/>
+              </a:spcAft>
+              <a:defRPr sz="1300">
+                <a:solidFill>
+                  <a:srgbClr val="444A52"/>
+                </a:solidFill>
+              </a:defRPr>
+            </a:pPr>
+            <a:r>
+              <a:t>•  Entre ambas hay media desviación estándar de diferencia.</a:t>
+            </a:r>
+          </a:p>
+          <a:p>
+            <a:pPr>
+              <a:spcAft>
+                <a:spcPts val="800"/>
+              </a:spcAft>
+              <a:defRPr sz="1300">
+                <a:solidFill>
+                  <a:srgbClr val="444A52"/>
+                </a:solidFill>
+              </a:defRPr>
+            </a:pPr>
+            <a:r>
+              <a:t>•  La banda tropical norte concentra además el mínimo (−3.97) y el máximo (4.06) absolutos: es donde ocurren las anomalías más pronunciadas en ambos sentidos.</a:t>
+            </a:r>
+          </a:p>
+          <a:p>
+            <a:pPr>
+              <a:spcAft>
+                <a:spcPts val="800"/>
+              </a:spcAft>
+              <a:defRPr sz="1300">
+                <a:solidFill>
+                  <a:srgbClr val="444A52"/>
+                </a:solidFill>
+              </a:defRPr>
+            </a:pPr>
+            <a:r>
+              <a:t>•  La banda polar sur no tiene ninguna observación: la Antártida queda fuera.</a:t>
+            </a:r>
+          </a:p>
+        </p:txBody>
+      </p:sp>
+      <p:sp>
+        <p:nvSpPr>
+          <p:cNvPr id="5" name="TextBox 4"/>
+          <p:cNvSpPr txBox="1"/>
+          <p:nvPr/>
+        </p:nvSpPr>
+        <p:spPr>
+          <a:xfrm>
+            <a:off x="640080" y="6144768"/>
+            <a:ext cx="10911535" cy="502920"/>
+          </a:xfrm>
+          <a:prstGeom prst="rect">
+            <a:avLst/>
+          </a:prstGeom>
+          <a:noFill/>
+        </p:spPr>
+        <p:txBody>
+          <a:bodyPr wrap="none">
+            <a:spAutoFit/>
+          </a:bodyPr>
+          <a:lstStyle/>
+          <a:p>
+            <a:pPr>
+              <a:defRPr sz="1500" i="1" b="1">
+                <a:solidFill>
+                  <a:srgbClr val="0F6E63"/>
+                </a:solidFill>
+              </a:defRPr>
+            </a:pPr>
+            <a:r>
+              <a:t>El promedio global no representa a ninguna región en particular.</a:t>
+            </a:r>
+          </a:p>
+        </p:txBody>
+      </p:sp>
+    </p:spTree>
+  </p:cSld>
+  <p:clrMapOvr>
+    <a:masterClrMapping/>
+  </p:clrMapOvr>
+</p:sld>
+</file>
+
+<file path=ppt/slides/slide13.xml><?xml version="1.0" encoding="utf-8"?>
+<p:sld xmlns:a="http://schemas.openxmlformats.org/drawingml/2006/main" xmlns:p="http://schemas.openxmlformats.org/presentationml/2006/main" xmlns:r="http://schemas.openxmlformats.org/officeDocument/2006/relationships">
+  <p:cSld>
+    <p:spTree>
+      <p:nvGrpSpPr>
+        <p:cNvPr id="1" name=""/>
+        <p:cNvGrpSpPr/>
+        <p:nvPr/>
+      </p:nvGrpSpPr>
+      <p:grpSpPr/>
+      <p:sp>
+        <p:nvSpPr>
+          <p:cNvPr id="2" name="TextBox 1"/>
+          <p:cNvSpPr txBox="1"/>
+          <p:nvPr/>
+        </p:nvSpPr>
+        <p:spPr>
+          <a:xfrm>
+            <a:off x="548640" y="274320"/>
+            <a:ext cx="11094415" cy="731520"/>
+          </a:xfrm>
+          <a:prstGeom prst="rect">
+            <a:avLst/>
+          </a:prstGeom>
+          <a:noFill/>
+        </p:spPr>
+        <p:txBody>
+          <a:bodyPr wrap="none">
+            <a:spAutoFit/>
+          </a:bodyPr>
+          <a:lstStyle/>
+          <a:p>
+            <a:pPr>
+              <a:defRPr sz="3000" b="1">
+                <a:solidFill>
+                  <a:srgbClr val="1F3A5F"/>
+                </a:solidFill>
+              </a:defRPr>
+            </a:pPr>
+            <a:r>
+              <a:t>Principales relaciones entre variables</a:t>
+            </a:r>
+          </a:p>
+        </p:txBody>
+      </p:sp>
+      <p:pic>
+        <p:nvPicPr>
+          <p:cNvPr id="3" name="Picture 2" descr="19_matriz_correlacion.png"/>
+          <p:cNvPicPr>
+            <a:picLocks noChangeAspect="1"/>
+          </p:cNvPicPr>
+          <p:nvPr/>
+        </p:nvPicPr>
+        <p:blipFill>
+          <a:blip r:embed="rId2"/>
+          <a:stretch>
+            <a:fillRect/>
+          </a:stretch>
+        </p:blipFill>
+        <p:spPr>
+          <a:xfrm>
+            <a:off x="640080" y="1188720"/>
+            <a:ext cx="4937760" cy="4343016"/>
+          </a:xfrm>
+          <a:prstGeom prst="rect">
+            <a:avLst/>
+          </a:prstGeom>
+        </p:spPr>
+      </p:pic>
+      <p:sp>
+        <p:nvSpPr>
+          <p:cNvPr id="4" name="TextBox 3"/>
+          <p:cNvSpPr txBox="1"/>
+          <p:nvPr/>
+        </p:nvSpPr>
+        <p:spPr>
+          <a:xfrm>
+            <a:off x="5852160" y="1325880"/>
+            <a:ext cx="5760720" cy="4023360"/>
+          </a:xfrm>
+          <a:prstGeom prst="rect">
+            <a:avLst/>
+          </a:prstGeom>
+          <a:noFill/>
+        </p:spPr>
+        <p:txBody>
+          <a:bodyPr wrap="square">
+            <a:spAutoFit/>
+          </a:bodyPr>
+          <a:lstStyle/>
+          <a:p>
+            <a:pPr>
+              <a:spcAft>
+                <a:spcPts val="800"/>
+              </a:spcAft>
+              <a:defRPr sz="1400">
+                <a:solidFill>
+                  <a:srgbClr val="444A52"/>
+                </a:solidFill>
+              </a:defRPr>
+            </a:pPr>
+            <a:r>
+              <a:t>•  Correlación con la variable objetivo:</a:t>
+            </a:r>
+          </a:p>
+          <a:p>
+            <a:pPr>
+              <a:spcAft>
+                <a:spcPts val="800"/>
+              </a:spcAft>
+              <a:defRPr sz="1200">
+                <a:solidFill>
+                  <a:srgbClr val="444A52"/>
+                </a:solidFill>
+              </a:defRPr>
+            </a:pPr>
+            <a:r>
+              <a:t>    TWS del mes actual  ·  0.803</a:t>
+            </a:r>
+          </a:p>
+          <a:p>
+            <a:pPr>
+              <a:spcAft>
+                <a:spcPts val="800"/>
+              </a:spcAft>
+              <a:defRPr sz="1200">
+                <a:solidFill>
+                  <a:srgbClr val="444A52"/>
+                </a:solidFill>
+              </a:defRPr>
+            </a:pPr>
+            <a:r>
+              <a:t>    SPEI a 12 meses  ·  0.380</a:t>
+            </a:r>
+          </a:p>
+          <a:p>
+            <a:pPr>
+              <a:spcAft>
+                <a:spcPts val="800"/>
+              </a:spcAft>
+              <a:defRPr sz="1200">
+                <a:solidFill>
+                  <a:srgbClr val="444A52"/>
+                </a:solidFill>
+              </a:defRPr>
+            </a:pPr>
+            <a:r>
+              <a:t>    SPEI a 6 meses  ·  0.368</a:t>
+            </a:r>
+          </a:p>
+          <a:p>
+            <a:pPr>
+              <a:spcAft>
+                <a:spcPts val="800"/>
+              </a:spcAft>
+              <a:defRPr sz="1200">
+                <a:solidFill>
+                  <a:srgbClr val="444A52"/>
+                </a:solidFill>
+              </a:defRPr>
+            </a:pPr>
+            <a:r>
+              <a:t>    Humedad del suelo  ·  0.320</a:t>
+            </a:r>
+          </a:p>
+          <a:p>
+            <a:pPr>
+              <a:spcAft>
+                <a:spcPts val="800"/>
+              </a:spcAft>
+              <a:defRPr sz="1200">
+                <a:solidFill>
+                  <a:srgbClr val="444A52"/>
+                </a:solidFill>
+              </a:defRPr>
+            </a:pPr>
+            <a:r>
+              <a:t>    SPEI a 3 meses  ·  0.285</a:t>
+            </a:r>
+          </a:p>
+          <a:p>
+            <a:pPr>
+              <a:spcAft>
+                <a:spcPts val="800"/>
+              </a:spcAft>
+              <a:defRPr sz="1200">
+                <a:solidFill>
+                  <a:srgbClr val="444A52"/>
+                </a:solidFill>
+              </a:defRPr>
+            </a:pPr>
+            <a:r>
+              <a:t>    SPEI a 1 mes  ·  0.204</a:t>
+            </a:r>
+          </a:p>
+          <a:p>
+            <a:pPr>
+              <a:spcAft>
+                <a:spcPts val="800"/>
+              </a:spcAft>
+              <a:defRPr sz="1400">
+                <a:solidFill>
+                  <a:srgbClr val="444A52"/>
+                </a:solidFill>
+              </a:defRPr>
+            </a:pPr>
+            <a:r>
+              <a:t>•  Los SPEI se ordenan exactamente por escala de acumulación.</a:t>
+            </a:r>
+          </a:p>
+          <a:p>
+            <a:pPr>
+              <a:spcAft>
+                <a:spcPts val="800"/>
+              </a:spcAft>
+              <a:defRPr sz="1400">
+                <a:solidFill>
+                  <a:srgbClr val="444A52"/>
+                </a:solidFill>
+              </a:defRPr>
+            </a:pPr>
+            <a:r>
+              <a:t>•  Relaciones lineales: Pearson y Spearman difieren 0.024 como máximo.</a:t>
+            </a:r>
+          </a:p>
+        </p:txBody>
+      </p:sp>
+      <p:sp>
+        <p:nvSpPr>
+          <p:cNvPr id="5" name="TextBox 4"/>
+          <p:cNvSpPr txBox="1"/>
+          <p:nvPr/>
+        </p:nvSpPr>
+        <p:spPr>
+          <a:xfrm>
+            <a:off x="640080" y="6144768"/>
+            <a:ext cx="10911535" cy="502920"/>
+          </a:xfrm>
+          <a:prstGeom prst="rect">
+            <a:avLst/>
+          </a:prstGeom>
+          <a:noFill/>
+        </p:spPr>
+        <p:txBody>
+          <a:bodyPr wrap="none">
+            <a:spAutoFit/>
+          </a:bodyPr>
+          <a:lstStyle/>
+          <a:p>
+            <a:pPr>
+              <a:defRPr sz="1500" i="1" b="1">
+                <a:solidFill>
+                  <a:srgbClr val="0F6E63"/>
+                </a:solidFill>
+              </a:defRPr>
+            </a:pPr>
+            <a:r>
+              <a:t>Asociación, no causalidad: que se muevan juntas no prueba que una determine a la otra.</a:t>
+            </a:r>
+          </a:p>
+        </p:txBody>
+      </p:sp>
+    </p:spTree>
+  </p:cSld>
+  <p:clrMapOvr>
+    <a:masterClrMapping/>
+  </p:clrMapOvr>
+</p:sld>
+</file>
+
+<file path=ppt/slides/slide14.xml><?xml version="1.0" encoding="utf-8"?>
+<p:sld xmlns:a="http://schemas.openxmlformats.org/drawingml/2006/main" xmlns:p="http://schemas.openxmlformats.org/presentationml/2006/main" xmlns:r="http://schemas.openxmlformats.org/officeDocument/2006/relationships">
+  <p:cSld>
+    <p:spTree>
+      <p:nvGrpSpPr>
+        <p:cNvPr id="1" name=""/>
+        <p:cNvGrpSpPr/>
+        <p:nvPr/>
+      </p:nvGrpSpPr>
+      <p:grpSpPr/>
+      <p:sp>
+        <p:nvSpPr>
+          <p:cNvPr id="2" name="TextBox 1"/>
+          <p:cNvSpPr txBox="1"/>
+          <p:nvPr/>
+        </p:nvSpPr>
+        <p:spPr>
+          <a:xfrm>
+            <a:off x="548640" y="274320"/>
+            <a:ext cx="11094415" cy="731520"/>
+          </a:xfrm>
+          <a:prstGeom prst="rect">
+            <a:avLst/>
+          </a:prstGeom>
+          <a:noFill/>
+        </p:spPr>
+        <p:txBody>
+          <a:bodyPr wrap="none">
+            <a:spAutoFit/>
+          </a:bodyPr>
+          <a:lstStyle/>
+          <a:p>
+            <a:pPr>
+              <a:defRPr sz="3000" b="1">
+                <a:solidFill>
+                  <a:srgbClr val="1F3A5F"/>
+                </a:solidFill>
+              </a:defRPr>
+            </a:pPr>
+            <a:r>
+              <a:t>La línea base que hay que superar</a:t>
+            </a:r>
+          </a:p>
+        </p:txBody>
+      </p:sp>
+      <p:sp>
+        <p:nvSpPr>
+          <p:cNvPr id="3" name="TextBox 2"/>
+          <p:cNvSpPr txBox="1"/>
+          <p:nvPr/>
+        </p:nvSpPr>
+        <p:spPr>
+          <a:xfrm>
+            <a:off x="640080" y="1143000"/>
+            <a:ext cx="10911535" cy="4023360"/>
+          </a:xfrm>
+          <a:prstGeom prst="rect">
+            <a:avLst/>
+          </a:prstGeom>
+          <a:noFill/>
+        </p:spPr>
+        <p:txBody>
+          <a:bodyPr wrap="square">
+            <a:spAutoFit/>
+          </a:bodyPr>
+          <a:lstStyle/>
+          <a:p>
+            <a:pPr>
+              <a:spcAft>
+                <a:spcPts val="800"/>
+              </a:spcAft>
+              <a:defRPr sz="1500">
+                <a:solidFill>
+                  <a:srgbClr val="444A52"/>
+                </a:solidFill>
+              </a:defRPr>
+            </a:pPr>
+            <a:r>
+              <a:t>•  Si el agua tiene tanta inercia, la regla más simple ya predice bien: «el mes que viene será como este».</a:t>
+            </a:r>
+          </a:p>
+          <a:p>
+            <a:pPr>
+              <a:spcAft>
+                <a:spcPts val="800"/>
+              </a:spcAft>
+              <a:defRPr sz="1500">
+                <a:solidFill>
+                  <a:srgbClr val="444A52"/>
+                </a:solidFill>
+              </a:defRPr>
+            </a:pPr>
+            <a:r>
+              <a:t>•  Esa regla se llama línea base de persistencia y da RMSE 0.5724, equivalente al 62.8 % de la desviación estándar de la objetivo.</a:t>
+            </a:r>
+          </a:p>
+          <a:p>
+            <a:pPr>
+              <a:spcAft>
+                <a:spcPts val="800"/>
+              </a:spcAft>
+              <a:defRPr sz="1500">
+                <a:solidFill>
+                  <a:srgbClr val="444A52"/>
+                </a:solidFill>
+              </a:defRPr>
+            </a:pPr>
+            <a:r>
+              <a:t>•  Como la métrica del reto es el RMSE, ese número es la referencia concreta: un modelo que no baje de 0.5724 no aporta nada.</a:t>
+            </a:r>
+          </a:p>
+        </p:txBody>
+      </p:sp>
+      <p:pic>
+        <p:nvPicPr>
+          <p:cNvPr id="4" name="Picture 3" descr="19_linea_base_persistencia.png"/>
+          <p:cNvPicPr>
+            <a:picLocks noChangeAspect="1"/>
+          </p:cNvPicPr>
+          <p:nvPr/>
+        </p:nvPicPr>
+        <p:blipFill>
+          <a:blip r:embed="rId2"/>
+          <a:stretch>
+            <a:fillRect/>
+          </a:stretch>
+        </p:blipFill>
+        <p:spPr>
+          <a:xfrm>
+            <a:off x="1280160" y="2651760"/>
+            <a:ext cx="9601200" cy="2953343"/>
+          </a:xfrm>
+          <a:prstGeom prst="rect">
+            <a:avLst/>
+          </a:prstGeom>
+        </p:spPr>
+      </p:pic>
+      <p:sp>
+        <p:nvSpPr>
+          <p:cNvPr id="5" name="TextBox 4"/>
+          <p:cNvSpPr txBox="1"/>
+          <p:nvPr/>
+        </p:nvSpPr>
+        <p:spPr>
+          <a:xfrm>
+            <a:off x="640080" y="6144768"/>
+            <a:ext cx="10911535" cy="502920"/>
+          </a:xfrm>
+          <a:prstGeom prst="rect">
+            <a:avLst/>
+          </a:prstGeom>
+          <a:noFill/>
+        </p:spPr>
+        <p:txBody>
+          <a:bodyPr wrap="none">
+            <a:spAutoFit/>
+          </a:bodyPr>
+          <a:lstStyle/>
+          <a:p>
+            <a:pPr>
+              <a:defRPr sz="1500" i="1" b="1">
+                <a:solidFill>
+                  <a:srgbClr val="0F6E63"/>
+                </a:solidFill>
+              </a:defRPr>
+            </a:pPr>
+            <a:r>
+              <a:t>Todo modelo futuro se mide contra este número.</a:t>
+            </a:r>
+          </a:p>
+        </p:txBody>
+      </p:sp>
+    </p:spTree>
+  </p:cSld>
+  <p:clrMapOvr>
+    <a:masterClrMapping/>
+  </p:clrMapOvr>
+</p:sld>
+</file>
+
+<file path=ppt/slides/slide15.xml><?xml version="1.0" encoding="utf-8"?>
+<p:sld xmlns:a="http://schemas.openxmlformats.org/drawingml/2006/main" xmlns:p="http://schemas.openxmlformats.org/presentationml/2006/main" xmlns:r="http://schemas.openxmlformats.org/officeDocument/2006/relationships">
+  <p:cSld>
+    <p:spTree>
+      <p:nvGrpSpPr>
+        <p:cNvPr id="1" name=""/>
+        <p:cNvGrpSpPr/>
+        <p:nvPr/>
+      </p:nvGrpSpPr>
+      <p:grpSpPr/>
+      <p:sp>
+        <p:nvSpPr>
+          <p:cNvPr id="2" name="TextBox 1"/>
+          <p:cNvSpPr txBox="1"/>
+          <p:nvPr/>
+        </p:nvSpPr>
+        <p:spPr>
+          <a:xfrm>
+            <a:off x="548640" y="274320"/>
+            <a:ext cx="11094415" cy="731520"/>
+          </a:xfrm>
+          <a:prstGeom prst="rect">
+            <a:avLst/>
+          </a:prstGeom>
+          <a:noFill/>
+        </p:spPr>
+        <p:txBody>
+          <a:bodyPr wrap="none">
+            <a:spAutoFit/>
+          </a:bodyPr>
+          <a:lstStyle/>
+          <a:p>
+            <a:pPr>
+              <a:defRPr sz="3000" b="1">
+                <a:solidFill>
+                  <a:srgbClr val="1F3A5F"/>
+                </a:solidFill>
+              </a:defRPr>
+            </a:pPr>
+            <a:r>
+              <a:t>Hallazgos más importantes</a:t>
+            </a:r>
+          </a:p>
+        </p:txBody>
+      </p:sp>
+      <p:sp>
+        <p:nvSpPr>
+          <p:cNvPr id="3" name="TextBox 2"/>
+          <p:cNvSpPr txBox="1"/>
+          <p:nvPr/>
+        </p:nvSpPr>
+        <p:spPr>
+          <a:xfrm>
+            <a:off x="640080" y="1188720"/>
+            <a:ext cx="10911535" cy="4023360"/>
+          </a:xfrm>
+          <a:prstGeom prst="rect">
+            <a:avLst/>
+          </a:prstGeom>
+          <a:noFill/>
+        </p:spPr>
+        <p:txBody>
+          <a:bodyPr wrap="square">
+            <a:spAutoFit/>
+          </a:bodyPr>
+          <a:lstStyle/>
+          <a:p>
+            <a:pPr>
+              <a:spcAft>
+                <a:spcPts val="800"/>
+              </a:spcAft>
+              <a:defRPr sz="1500">
+                <a:solidFill>
+                  <a:srgbClr val="444A52"/>
+                </a:solidFill>
+              </a:defRPr>
+            </a:pPr>
+            <a:r>
+              <a:t>•  Sin nulos ni duplicados, pero faltan 22 meses completos del calendario.</a:t>
+            </a:r>
+          </a:p>
+          <a:p>
+            <a:pPr>
+              <a:spcAft>
+                <a:spcPts val="800"/>
+              </a:spcAft>
+              <a:defRPr sz="1500">
+                <a:solidFill>
+                  <a:srgbClr val="444A52"/>
+                </a:solidFill>
+              </a:defRPr>
+            </a:pPr>
+            <a:r>
+              <a:t>•  La variable objetivo es el TWS del mes calendario t+1 — lo verificamos celda por celda, no lo dimos por supuesto.</a:t>
+            </a:r>
+          </a:p>
+          <a:p>
+            <a:pPr>
+              <a:spcAft>
+                <a:spcPts val="800"/>
+              </a:spcAft>
+              <a:defRPr sz="1500">
+                <a:solidFill>
+                  <a:srgbClr val="444A52"/>
+                </a:solidFill>
+              </a:defRPr>
+            </a:pPr>
+            <a:r>
+              <a:t>•  Las variables están estandarizadas: no admiten lectura como volumen físico.</a:t>
+            </a:r>
+          </a:p>
+          <a:p>
+            <a:pPr>
+              <a:spcAft>
+                <a:spcPts val="800"/>
+              </a:spcAft>
+              <a:defRPr sz="1500">
+                <a:solidFill>
+                  <a:srgbClr val="444A52"/>
+                </a:solidFill>
+              </a:defRPr>
+            </a:pPr>
+            <a:r>
+              <a:t>•  Tendencia descendente y serie no estacionaria en media.</a:t>
+            </a:r>
+          </a:p>
+          <a:p>
+            <a:pPr>
+              <a:spcAft>
+                <a:spcPts val="800"/>
+              </a:spcAft>
+              <a:defRPr sz="1500">
+                <a:solidFill>
+                  <a:srgbClr val="444A52"/>
+                </a:solidFill>
+              </a:defRPr>
+            </a:pPr>
+            <a:r>
+              <a:t>•  La estacionalidad se cancela globalmente, pero existe por región.</a:t>
+            </a:r>
+          </a:p>
+          <a:p>
+            <a:pPr>
+              <a:spcAft>
+                <a:spcPts val="800"/>
+              </a:spcAft>
+              <a:defRPr sz="1500">
+                <a:solidFill>
+                  <a:srgbClr val="444A52"/>
+                </a:solidFill>
+              </a:defRPr>
+            </a:pPr>
+            <a:r>
+              <a:t>•  Desbalance espacial: 80 % de las observaciones en el hemisferio norte.</a:t>
+            </a:r>
+          </a:p>
+          <a:p>
+            <a:pPr>
+              <a:spcAft>
+                <a:spcPts val="800"/>
+              </a:spcAft>
+              <a:defRPr sz="1500">
+                <a:solidFill>
+                  <a:srgbClr val="444A52"/>
+                </a:solidFill>
+              </a:defRPr>
+            </a:pPr>
+            <a:r>
+              <a:t>•  La persistencia domina, con correlación 0.803.</a:t>
+            </a:r>
+          </a:p>
+          <a:p>
+            <a:pPr>
+              <a:spcAft>
+                <a:spcPts val="800"/>
+              </a:spcAft>
+              <a:defRPr sz="1500">
+                <a:solidFill>
+                  <a:srgbClr val="444A52"/>
+                </a:solidFill>
+              </a:defRPr>
+            </a:pPr>
+            <a:r>
+              <a:t>•  Línea base a superar: RMSE 0.5724.</a:t>
+            </a:r>
+          </a:p>
+        </p:txBody>
+      </p:sp>
+    </p:spTree>
+  </p:cSld>
+  <p:clrMapOvr>
+    <a:masterClrMapping/>
+  </p:clrMapOvr>
+</p:sld>
+</file>
+
+<file path=ppt/slides/slide16.xml><?xml version="1.0" encoding="utf-8"?>
+<p:sld xmlns:a="http://schemas.openxmlformats.org/drawingml/2006/main" xmlns:p="http://schemas.openxmlformats.org/presentationml/2006/main" xmlns:r="http://schemas.openxmlformats.org/officeDocument/2006/relationships">
+  <p:cSld>
+    <p:spTree>
+      <p:nvGrpSpPr>
+        <p:cNvPr id="1" name=""/>
+        <p:cNvGrpSpPr/>
+        <p:nvPr/>
+      </p:nvGrpSpPr>
+      <p:grpSpPr/>
+      <p:sp>
+        <p:nvSpPr>
+          <p:cNvPr id="2" name="TextBox 1"/>
+          <p:cNvSpPr txBox="1"/>
+          <p:nvPr/>
+        </p:nvSpPr>
+        <p:spPr>
+          <a:xfrm>
+            <a:off x="548640" y="274320"/>
+            <a:ext cx="11094415" cy="731520"/>
+          </a:xfrm>
+          <a:prstGeom prst="rect">
+            <a:avLst/>
+          </a:prstGeom>
+          <a:noFill/>
+        </p:spPr>
+        <p:txBody>
+          <a:bodyPr wrap="none">
+            <a:spAutoFit/>
+          </a:bodyPr>
+          <a:lstStyle/>
+          <a:p>
+            <a:pPr>
+              <a:defRPr sz="3000" b="1">
+                <a:solidFill>
+                  <a:srgbClr val="1F3A5F"/>
+                </a:solidFill>
+              </a:defRPr>
+            </a:pPr>
+            <a:r>
+              <a:t>Conclusiones y próximos pasos</a:t>
+            </a:r>
+          </a:p>
+        </p:txBody>
+      </p:sp>
+      <p:sp>
+        <p:nvSpPr>
+          <p:cNvPr id="3" name="TextBox 2"/>
+          <p:cNvSpPr txBox="1"/>
+          <p:nvPr/>
+        </p:nvSpPr>
+        <p:spPr>
+          <a:xfrm>
+            <a:off x="640080" y="1188720"/>
+            <a:ext cx="5303520" cy="4023360"/>
+          </a:xfrm>
+          <a:prstGeom prst="rect">
+            <a:avLst/>
+          </a:prstGeom>
+          <a:noFill/>
+        </p:spPr>
+        <p:txBody>
+          <a:bodyPr wrap="square">
+            <a:spAutoFit/>
+          </a:bodyPr>
+          <a:lstStyle/>
+          <a:p>
+            <a:pPr>
+              <a:spcAft>
+                <a:spcPts val="800"/>
+              </a:spcAft>
+              <a:defRPr sz="1500">
+                <a:solidFill>
+                  <a:srgbClr val="444A52"/>
+                </a:solidFill>
+              </a:defRPr>
+            </a:pPr>
+            <a:r>
+              <a:t>•  El problema de calidad no eran los nulos, era la cobertura del calendario.</a:t>
+            </a:r>
+          </a:p>
+          <a:p>
+            <a:pPr>
+              <a:spcAft>
+                <a:spcPts val="800"/>
+              </a:spcAft>
+              <a:defRPr sz="1500">
+                <a:solidFill>
+                  <a:srgbClr val="444A52"/>
+                </a:solidFill>
+              </a:defRPr>
+            </a:pPr>
+            <a:r>
+              <a:t>•  El promedio global no representa a ninguna región: hay que analizar por zona.</a:t>
+            </a:r>
+          </a:p>
+          <a:p>
+            <a:pPr>
+              <a:spcAft>
+                <a:spcPts val="800"/>
+              </a:spcAft>
+              <a:defRPr sz="1500">
+                <a:solidFill>
+                  <a:srgbClr val="444A52"/>
+                </a:solidFill>
+              </a:defRPr>
+            </a:pPr>
+            <a:r>
+              <a:t>•  La inercia del sistema es la señal más fuerte disponible.</a:t>
+            </a:r>
+          </a:p>
+          <a:p>
+            <a:pPr>
+              <a:spcAft>
+                <a:spcPts val="800"/>
+              </a:spcAft>
+              <a:defRPr sz="1500">
+                <a:solidFill>
+                  <a:srgbClr val="444A52"/>
+                </a:solidFill>
+              </a:defRPr>
+            </a:pPr>
+            <a:r>
+              <a:t>•  El análisis es descriptivo y asociativo: no establecemos causalidad.</a:t>
+            </a:r>
+          </a:p>
+        </p:txBody>
+      </p:sp>
+      <p:sp>
+        <p:nvSpPr>
+          <p:cNvPr id="4" name="TextBox 3"/>
+          <p:cNvSpPr txBox="1"/>
+          <p:nvPr/>
+        </p:nvSpPr>
+        <p:spPr>
+          <a:xfrm>
+            <a:off x="6492240" y="1188720"/>
             <a:ext cx="5212080" cy="4023360"/>
           </a:xfrm>
           <a:prstGeom prst="rect">
@@ -3269,75 +6792,7 @@
           <a:p>
             <a:pPr>
               <a:spcAft>
-                <a:spcPts val="1000"/>
-              </a:spcAft>
-              <a:defRPr sz="1500">
-                <a:solidFill>
-                  <a:srgbClr val="444A52"/>
-                </a:solidFill>
-              </a:defRPr>
-            </a:pPr>
-            <a:r>
-              <a:t>•  El problema de calidad no son los nulos, es la cobertura del calendario.</a:t>
-            </a:r>
-          </a:p>
-          <a:p>
-            <a:pPr>
-              <a:spcAft>
-                <a:spcPts val="1000"/>
-              </a:spcAft>
-              <a:defRPr sz="1500">
-                <a:solidFill>
-                  <a:srgbClr val="444A52"/>
-                </a:solidFill>
-              </a:defRPr>
-            </a:pPr>
-            <a:r>
-              <a:t>•  El promedio global no es representativo: hay que analizar por región.</a:t>
-            </a:r>
-          </a:p>
-          <a:p>
-            <a:pPr>
-              <a:spcAft>
-                <a:spcPts val="1000"/>
-              </a:spcAft>
-              <a:defRPr sz="1500">
-                <a:solidFill>
-                  <a:srgbClr val="444A52"/>
-                </a:solidFill>
-              </a:defRPr>
-            </a:pPr>
-            <a:r>
-              <a:t>•  La inercia del sistema es la señal más fuerte disponible.</a:t>
-            </a:r>
-          </a:p>
-        </p:txBody>
-      </p:sp>
-      <p:sp>
-        <p:nvSpPr>
-          <p:cNvPr id="4" name="TextBox 3"/>
-          <p:cNvSpPr txBox="1"/>
-          <p:nvPr/>
-        </p:nvSpPr>
-        <p:spPr>
-          <a:xfrm>
-            <a:off x="6400800" y="1234440"/>
-            <a:ext cx="5303520" cy="4023360"/>
-          </a:xfrm>
-          <a:prstGeom prst="rect">
-            <a:avLst/>
-          </a:prstGeom>
-          <a:noFill/>
-        </p:spPr>
-        <p:txBody>
-          <a:bodyPr wrap="square">
-            <a:spAutoFit/>
-          </a:bodyPr>
-          <a:lstStyle/>
-          <a:p>
-            <a:pPr>
-              <a:spcAft>
-                <a:spcPts val="1000"/>
+                <a:spcPts val="800"/>
               </a:spcAft>
               <a:defRPr sz="1400">
                 <a:solidFill>
@@ -3352,7 +6807,7 @@
           <a:p>
             <a:pPr>
               <a:spcAft>
-                <a:spcPts val="1000"/>
+                <a:spcPts val="800"/>
               </a:spcAft>
               <a:defRPr sz="1400">
                 <a:solidFill>
@@ -3367,7 +6822,7 @@
           <a:p>
             <a:pPr>
               <a:spcAft>
-                <a:spcPts val="1000"/>
+                <a:spcPts val="800"/>
               </a:spcAft>
               <a:defRPr sz="1400">
                 <a:solidFill>
@@ -3382,7 +6837,7 @@
           <a:p>
             <a:pPr>
               <a:spcAft>
-                <a:spcPts val="1000"/>
+                <a:spcPts val="800"/>
               </a:spcAft>
               <a:defRPr sz="1400">
                 <a:solidFill>
@@ -3391,13 +6846,13 @@
               </a:defRPr>
             </a:pPr>
             <a:r>
-              <a:t>•  Tratar la tendencia explícitamente.</a:t>
+              <a:t>•  Tratar la tendencia de forma explícita.</a:t>
             </a:r>
           </a:p>
           <a:p>
             <a:pPr>
               <a:spcAft>
-                <a:spcPts val="1000"/>
+                <a:spcPts val="800"/>
               </a:spcAft>
               <a:defRPr sz="1400">
                 <a:solidFill>
@@ -3406,13 +6861,13 @@
               </a:defRPr>
             </a:pPr>
             <a:r>
-              <a:t>•  Priorizar SPEI_12_t y SPEI_06_t.</a:t>
+              <a:t>•  Priorizar los SPEI de escala larga (12 y 6 meses).</a:t>
             </a:r>
           </a:p>
           <a:p>
             <a:pPr>
               <a:spcAft>
-                <a:spcPts val="1000"/>
+                <a:spcPts val="800"/>
               </a:spcAft>
               <a:defRPr sz="1400">
                 <a:solidFill>
@@ -3427,7 +6882,7 @@
           <a:p>
             <a:pPr>
               <a:spcAft>
-                <a:spcPts val="1000"/>
+                <a:spcPts val="800"/>
               </a:spcAft>
               <a:defRPr sz="1400">
                 <a:solidFill>
@@ -3436,7 +6891,7 @@
               </a:defRPr>
             </a:pPr>
             <a:r>
-              <a:t>•  Manejar el enmascaramiento del 66.53 % de TWS_t en test.</a:t>
+              <a:t>•  Manejar el enmascaramiento del 66.53 % de TWS_t en el conjunto de prueba.</a:t>
             </a:r>
           </a:p>
         </p:txBody>
@@ -3449,7 +6904,7 @@
         </p:nvSpPr>
         <p:spPr>
           <a:xfrm>
-            <a:off x="640080" y="960120"/>
+            <a:off x="640080" y="914400"/>
             <a:ext cx="3657600" cy="320040"/>
           </a:xfrm>
           <a:prstGeom prst="rect">
@@ -3484,7 +6939,7 @@
         </p:nvSpPr>
         <p:spPr>
           <a:xfrm>
-            <a:off x="6400800" y="960120"/>
+            <a:off x="6492240" y="914400"/>
             <a:ext cx="3657600" cy="320040"/>
           </a:xfrm>
           <a:prstGeom prst="rect">
@@ -3507,6 +6962,41 @@
             </a:pPr>
             <a:r>
               <a:t>Próximos pasos</a:t>
+            </a:r>
+          </a:p>
+        </p:txBody>
+      </p:sp>
+      <p:sp>
+        <p:nvSpPr>
+          <p:cNvPr id="7" name="TextBox 6"/>
+          <p:cNvSpPr txBox="1"/>
+          <p:nvPr/>
+        </p:nvSpPr>
+        <p:spPr>
+          <a:xfrm>
+            <a:off x="640080" y="6144768"/>
+            <a:ext cx="10911535" cy="502920"/>
+          </a:xfrm>
+          <a:prstGeom prst="rect">
+            <a:avLst/>
+          </a:prstGeom>
+          <a:noFill/>
+        </p:spPr>
+        <p:txBody>
+          <a:bodyPr wrap="none">
+            <a:spAutoFit/>
+          </a:bodyPr>
+          <a:lstStyle/>
+          <a:p>
+            <a:pPr>
+              <a:defRPr sz="1500" i="1" b="1">
+                <a:solidFill>
+                  <a:srgbClr val="0F6E63"/>
+                </a:solidFill>
+              </a:defRPr>
+            </a:pPr>
+            <a:r>
+              <a:t>Gracias. ¿Preguntas?</a:t>
             </a:r>
           </a:p>
         </p:txBody>
@@ -3537,8 +7027,8 @@
         </p:nvSpPr>
         <p:spPr>
           <a:xfrm>
-            <a:off x="548640" y="320040"/>
-            <a:ext cx="11094415" cy="822960"/>
+            <a:off x="548640" y="274320"/>
+            <a:ext cx="11094415" cy="731520"/>
           </a:xfrm>
           <a:prstGeom prst="rect">
             <a:avLst/>
@@ -3552,14 +7042,14 @@
           <a:lstStyle/>
           <a:p>
             <a:pPr>
-              <a:defRPr sz="3200" b="1">
+              <a:defRPr sz="3000" b="1">
                 <a:solidFill>
                   <a:srgbClr val="1F3A5F"/>
                 </a:solidFill>
               </a:defRPr>
             </a:pPr>
             <a:r>
-              <a:t>Contexto del problema</a:t>
+              <a:t>¿Qué es el almacenamiento total de agua?</a:t>
             </a:r>
           </a:p>
         </p:txBody>
@@ -3572,8 +7062,8 @@
         </p:nvSpPr>
         <p:spPr>
           <a:xfrm>
-            <a:off x="640080" y="1280160"/>
-            <a:ext cx="4937760" cy="4023360"/>
+            <a:off x="640080" y="1188720"/>
+            <a:ext cx="5120640" cy="4023360"/>
           </a:xfrm>
           <a:prstGeom prst="rect">
             <a:avLst/>
@@ -3588,46 +7078,61 @@
           <a:p>
             <a:pPr>
               <a:spcAft>
-                <a:spcPts val="1000"/>
+                <a:spcPts val="800"/>
               </a:spcAft>
-              <a:defRPr sz="1600">
+              <a:defRPr sz="1500">
                 <a:solidFill>
                   <a:srgbClr val="444A52"/>
                 </a:solidFill>
               </a:defRPr>
             </a:pPr>
             <a:r>
-              <a:t>•  El TWS (Total Water Storage) es toda el agua sobre y bajo la superficie: subterránea, humedad del suelo, superficial, nieve y hielo.</a:t>
+              <a:t>•  El TWS (Total Water Storage) es toda el agua de un territorio: subterránea, humedad del suelo, superficial, nieve y hielo.</a:t>
             </a:r>
           </a:p>
           <a:p>
             <a:pPr>
               <a:spcAft>
-                <a:spcPts val="1000"/>
+                <a:spcPts val="800"/>
               </a:spcAft>
-              <a:defRPr sz="1600">
+              <a:defRPr sz="1500">
                 <a:solidFill>
                   <a:srgbClr val="444A52"/>
                 </a:solidFill>
               </a:defRPr>
             </a:pPr>
             <a:r>
-              <a:t>•  Las misiones GRACE y GRACE-FO lo estiman midiendo variaciones del campo gravitatorio terrestre.</a:t>
+              <a:t>•  Las misiones satelitales GRACE y GRACE-FO no lo ven directamente: miden variaciones del campo gravitatorio terrestre.</a:t>
             </a:r>
           </a:p>
           <a:p>
             <a:pPr>
               <a:spcAft>
-                <a:spcPts val="1000"/>
+                <a:spcPts val="800"/>
               </a:spcAft>
-              <a:defRPr sz="1600">
+              <a:defRPr sz="1500">
                 <a:solidFill>
                   <a:srgbClr val="444A52"/>
                 </a:solidFill>
               </a:defRPr>
             </a:pPr>
             <a:r>
-              <a:t>•  Es el mejor indicador integrado de sequía hidrológica a gran escala.</a:t>
+              <a:t>•  Como el agua tiene masa, un cambio en el almacenamiento cambia la gravedad local. De esa señal se deriva el TWS.</a:t>
+            </a:r>
+          </a:p>
+          <a:p>
+            <a:pPr>
+              <a:spcAft>
+                <a:spcPts val="800"/>
+              </a:spcAft>
+              <a:defRPr sz="1500">
+                <a:solidFill>
+                  <a:srgbClr val="444A52"/>
+                </a:solidFill>
+              </a:defRPr>
+            </a:pPr>
+            <a:r>
+              <a:t>•  Es el mejor indicador integrado de sequía hidrológica a gran escala, porque incluye el agua subterránea.</a:t>
             </a:r>
           </a:p>
         </p:txBody>
@@ -3648,8 +7153,8 @@
         </p:blipFill>
         <p:spPr>
           <a:xfrm>
-            <a:off x="5577840" y="1828800"/>
-            <a:ext cx="6217920" cy="3375050"/>
+            <a:off x="5760720" y="1828800"/>
+            <a:ext cx="6035040" cy="3275784"/>
           </a:xfrm>
           <a:prstGeom prst="rect">
             <a:avLst/>
@@ -3679,7 +7184,7 @@
           <a:lstStyle/>
           <a:p>
             <a:pPr>
-              <a:defRPr sz="1600" i="1" b="1">
+              <a:defRPr sz="1500" i="1" b="1">
                 <a:solidFill>
                   <a:srgbClr val="0F6E63"/>
                 </a:solidFill>
@@ -3717,8 +7222,8 @@
         </p:nvSpPr>
         <p:spPr>
           <a:xfrm>
-            <a:off x="548640" y="320040"/>
-            <a:ext cx="11094415" cy="822960"/>
+            <a:off x="548640" y="274320"/>
+            <a:ext cx="11094415" cy="731520"/>
           </a:xfrm>
           <a:prstGeom prst="rect">
             <a:avLst/>
@@ -3732,14 +7237,14 @@
           <a:lstStyle/>
           <a:p>
             <a:pPr>
-              <a:defRPr sz="3200" b="1">
+              <a:defRPr sz="3000" b="1">
                 <a:solidFill>
                   <a:srgbClr val="1F3A5F"/>
                 </a:solidFill>
               </a:defRPr>
             </a:pPr>
             <a:r>
-              <a:t>Problema científico y objetivos</a:t>
+              <a:t>El problema: la información llega tarde</a:t>
             </a:r>
           </a:p>
         </p:txBody>
@@ -3752,7 +7257,7 @@
         </p:nvSpPr>
         <p:spPr>
           <a:xfrm>
-            <a:off x="640080" y="1371600"/>
+            <a:off x="640080" y="1188720"/>
             <a:ext cx="10911535" cy="4023360"/>
           </a:xfrm>
           <a:prstGeom prst="rect">
@@ -3768,7 +7273,7 @@
           <a:p>
             <a:pPr>
               <a:spcAft>
-                <a:spcPts val="1000"/>
+                <a:spcPts val="800"/>
               </a:spcAft>
               <a:defRPr sz="1700">
                 <a:solidFill>
@@ -3777,13 +7282,13 @@
               </a:defRPr>
             </a:pPr>
             <a:r>
-              <a:t>•  El problema: los productos GRACE se publican con 2 a 3 meses de retraso. Para alerta temprana se necesita el estado actual, y se tiene el de hace un trimestre.</a:t>
+              <a:t>•  La sequía se instala despacio. Cuando ya se ve en los cultivos o en los pozos, el déficit lleva meses acumulándose.</a:t>
             </a:r>
           </a:p>
           <a:p>
             <a:pPr>
               <a:spcAft>
-                <a:spcPts val="1000"/>
+                <a:spcPts val="800"/>
               </a:spcAft>
               <a:defRPr sz="1700">
                 <a:solidFill>
@@ -3792,13 +7297,13 @@
               </a:defRPr>
             </a:pPr>
             <a:r>
-              <a:t>•  El reto: predecir el TWS del mes siguiente. Métrica de evaluación: RMSE.</a:t>
+              <a:t>•  Los productos derivados de GRACE se publican con un retraso de 2 a 3 meses.</a:t>
             </a:r>
           </a:p>
           <a:p>
             <a:pPr>
               <a:spcAft>
-                <a:spcPts val="1000"/>
+                <a:spcPts val="800"/>
               </a:spcAft>
               <a:defRPr sz="1700">
                 <a:solidFill>
@@ -3807,13 +7312,13 @@
               </a:defRPr>
             </a:pPr>
             <a:r>
-              <a:t>•  Pregunta científica: ¿qué patrones temporales, estacionales y espaciales presenta el TWS, y qué variables se asocian más con el valor del mes siguiente?</a:t>
+              <a:t>•  Para una alerta temprana se necesita el estado actual del sistema; lo que hay disponible es el estado de hace un trimestre.</a:t>
             </a:r>
           </a:p>
           <a:p>
             <a:pPr>
               <a:spcAft>
-                <a:spcPts val="1000"/>
+                <a:spcPts val="800"/>
               </a:spcAft>
               <a:defRPr sz="1700">
                 <a:solidFill>
@@ -3822,7 +7327,7 @@
               </a:defRPr>
             </a:pPr>
             <a:r>
-              <a:t>•  Objetivo: caracterizar esos patrones para sustentar un modelo posterior de pronóstico a un mes.</a:t>
+              <a:t>•  El reto pide predecir el TWS del mes siguiente a partir de la información del mes actual. La métrica de evaluación es el RMSE.</a:t>
             </a:r>
           </a:p>
         </p:txBody>
@@ -3850,14 +7355,14 @@
           <a:lstStyle/>
           <a:p>
             <a:pPr>
-              <a:defRPr sz="1600" i="1" b="1">
+              <a:defRPr sz="1500" i="1" b="1">
                 <a:solidFill>
                   <a:srgbClr val="0F6E63"/>
                 </a:solidFill>
               </a:defRPr>
             </a:pPr>
             <a:r>
-              <a:t>La información existe, pero llega tarde para decidir.</a:t>
+              <a:t>La información existe, pero llega tarde para sostener una decisión.</a:t>
             </a:r>
           </a:p>
         </p:txBody>
@@ -3888,8 +7393,8 @@
         </p:nvSpPr>
         <p:spPr>
           <a:xfrm>
-            <a:off x="548640" y="320040"/>
-            <a:ext cx="11094415" cy="822960"/>
+            <a:off x="548640" y="274320"/>
+            <a:ext cx="11094415" cy="731520"/>
           </a:xfrm>
           <a:prstGeom prst="rect">
             <a:avLst/>
@@ -3903,14 +7408,14 @@
           <a:lstStyle/>
           <a:p>
             <a:pPr>
-              <a:defRPr sz="3200" b="1">
+              <a:defRPr sz="3000" b="1">
                 <a:solidFill>
                   <a:srgbClr val="1F3A5F"/>
                 </a:solidFill>
               </a:defRPr>
             </a:pPr>
             <a:r>
-              <a:t>Descripción del dataset</a:t>
+              <a:t>Problema científico y objetivos</a:t>
             </a:r>
           </a:p>
         </p:txBody>
@@ -3923,7 +7428,7 @@
         </p:nvSpPr>
         <p:spPr>
           <a:xfrm>
-            <a:off x="640080" y="1371600"/>
+            <a:off x="640080" y="1188720"/>
             <a:ext cx="10911535" cy="4023360"/>
           </a:xfrm>
           <a:prstGeom prst="rect">
@@ -3939,76 +7444,61 @@
           <a:p>
             <a:pPr>
               <a:spcAft>
-                <a:spcPts val="1000"/>
+                <a:spcPts val="800"/>
               </a:spcAft>
-              <a:defRPr sz="1700">
+              <a:defRPr sz="1600">
                 <a:solidFill>
                   <a:srgbClr val="444A52"/>
                 </a:solidFill>
               </a:defRPr>
             </a:pPr>
             <a:r>
-              <a:t>•  2 154 021 observaciones de entrenamiento · 280 961 de prueba · 13 variables</a:t>
+              <a:t>•  Pregunta: ¿qué patrones temporales, estacionales y espaciales presenta el TWS, y qué variables del mes actual se asocian más con el valor del mes siguiente?</a:t>
             </a:r>
           </a:p>
           <a:p>
             <a:pPr>
               <a:spcAft>
-                <a:spcPts val="1000"/>
+                <a:spcPts val="800"/>
               </a:spcAft>
-              <a:defRPr sz="1700">
+              <a:defRPr sz="1600">
                 <a:solidFill>
                   <a:srgbClr val="444A52"/>
                 </a:solidFill>
               </a:defRPr>
             </a:pPr>
             <a:r>
-              <a:t>•  Rejilla global de 1°, con 15 715 celdas, de −55.5° a 83.5° de latitud</a:t>
+              <a:t>•  Objetivo general: caracterizar esos patrones para sustentar un modelo posterior de pronóstico a un mes.</a:t>
             </a:r>
           </a:p>
           <a:p>
             <a:pPr>
               <a:spcAft>
-                <a:spcPts val="1000"/>
+                <a:spcPts val="800"/>
               </a:spcAft>
-              <a:defRPr sz="1700">
+              <a:defRPr sz="1600">
                 <a:solidFill>
                   <a:srgbClr val="444A52"/>
                 </a:solidFill>
               </a:defRPr>
             </a:pPr>
             <a:r>
-              <a:t>•  Periodo: mayo 2002 – agosto 2015 (138 meses observados)</a:t>
+              <a:t>•  Seis objetivos específicos: describir la estructura, evaluar la calidad, analizar el comportamiento temporal, comparar regiones, medir asociaciones e identificar variables candidatas.</a:t>
             </a:r>
           </a:p>
           <a:p>
             <a:pPr>
               <a:spcAft>
-                <a:spcPts val="1000"/>
+                <a:spcPts val="800"/>
               </a:spcAft>
-              <a:defRPr sz="1700">
+              <a:defRPr sz="1600">
                 <a:solidFill>
                   <a:srgbClr val="444A52"/>
                 </a:solidFill>
               </a:defRPr>
             </a:pPr>
             <a:r>
-              <a:t>•  Variables: TWS_t, SPEI a 1/3/6/12 meses, SOIL_MOISTURE_t y target</a:t>
-            </a:r>
-          </a:p>
-          <a:p>
-            <a:pPr>
-              <a:spcAft>
-                <a:spcPts val="1000"/>
-              </a:spcAft>
-              <a:defRPr sz="1700">
-                <a:solidFill>
-                  <a:srgbClr val="444A52"/>
-                </a:solidFill>
-              </a:defRPr>
-            </a:pPr>
-            <a:r>
-              <a:t>•  Todas estandarizadas y adimensionales: no son centímetros de agua</a:t>
+              <a:t>•  Esta etapa es exploratoria: el objetivo no era construir el modelo, sino entender el problema antes de modelarlo.</a:t>
             </a:r>
           </a:p>
         </p:txBody>
@@ -4036,14 +7526,14 @@
           <a:lstStyle/>
           <a:p>
             <a:pPr>
-              <a:defRPr sz="1600" i="1" b="1">
+              <a:defRPr sz="1500" i="1" b="1">
                 <a:solidFill>
                   <a:srgbClr val="0F6E63"/>
                 </a:solidFill>
               </a:defRPr>
             </a:pPr>
             <a:r>
-              <a:t>Una fila por mes y por celda del planeta.</a:t>
+              <a:t>Una pregunta descriptiva y asociativa: en ningún momento afirmamos causalidad.</a:t>
             </a:r>
           </a:p>
         </p:txBody>
@@ -4074,8 +7564,8 @@
         </p:nvSpPr>
         <p:spPr>
           <a:xfrm>
-            <a:off x="548640" y="320040"/>
-            <a:ext cx="11094415" cy="822960"/>
+            <a:off x="548640" y="274320"/>
+            <a:ext cx="11094415" cy="731520"/>
           </a:xfrm>
           <a:prstGeom prst="rect">
             <a:avLst/>
@@ -4089,14 +7579,14 @@
           <a:lstStyle/>
           <a:p>
             <a:pPr>
-              <a:defRPr sz="3200" b="1">
+              <a:defRPr sz="3000" b="1">
                 <a:solidFill>
                   <a:srgbClr val="1F3A5F"/>
                 </a:solidFill>
               </a:defRPr>
             </a:pPr>
             <a:r>
-              <a:t>Calidad y limpieza de los datos</a:t>
+              <a:t>Descripción del dataset</a:t>
             </a:r>
           </a:p>
         </p:txBody>
@@ -4109,8 +7599,8 @@
         </p:nvSpPr>
         <p:spPr>
           <a:xfrm>
-            <a:off x="640080" y="1280160"/>
-            <a:ext cx="5120640" cy="4023360"/>
+            <a:off x="640080" y="1188720"/>
+            <a:ext cx="10911535" cy="4023360"/>
           </a:xfrm>
           <a:prstGeom prst="rect">
             <a:avLst/>
@@ -4125,92 +7615,98 @@
           <a:p>
             <a:pPr>
               <a:spcAft>
-                <a:spcPts val="1000"/>
+                <a:spcPts val="800"/>
               </a:spcAft>
-              <a:defRPr sz="1500">
+              <a:defRPr sz="1600">
                 <a:solidFill>
                   <a:srgbClr val="444A52"/>
                 </a:solidFill>
               </a:defRPr>
             </a:pPr>
             <a:r>
-              <a:t>•  Cero nulos y cero duplicados. Pero eso engaña.</a:t>
+              <a:t>•  2 154 021 observaciones de entrenamiento y 280 961 de prueba, con 13 variables.</a:t>
             </a:r>
           </a:p>
           <a:p>
             <a:pPr>
               <a:spcAft>
-                <a:spcPts val="1000"/>
+                <a:spcPts val="800"/>
               </a:spcAft>
-              <a:defRPr sz="1500">
+              <a:defRPr sz="1600">
                 <a:solidFill>
                   <a:srgbClr val="444A52"/>
                 </a:solidFill>
               </a:defRPr>
             </a:pPr>
             <a:r>
-              <a:t>•  El formato es plano: un mes no observado no genera filas, en vez de generar NaN.</a:t>
+              <a:t>•  Rejilla global de 1°, con 15 715 celdas, de −55.5° a 83.5° de latitud.</a:t>
             </a:r>
           </a:p>
           <a:p>
             <a:pPr>
               <a:spcAft>
-                <a:spcPts val="1000"/>
+                <a:spcPts val="800"/>
               </a:spcAft>
-              <a:defRPr sz="1500">
+              <a:defRPr sz="1600">
                 <a:solidFill>
                   <a:srgbClr val="444A52"/>
                 </a:solidFill>
               </a:defRPr>
             </a:pPr>
             <a:r>
-              <a:t>•  Faltan 22 de los 160 meses del calendario (13.8 %), en 2002–2003 y 2011–2014.</a:t>
+              <a:t>•  Periodo de entrenamiento: mayo 2002 a agosto 2015 (138 meses observados).</a:t>
             </a:r>
           </a:p>
           <a:p>
             <a:pPr>
               <a:spcAft>
-                <a:spcPts val="1000"/>
+                <a:spcPts val="800"/>
               </a:spcAft>
-              <a:defRPr sz="1500">
+              <a:defRPr sz="1600">
                 <a:solidFill>
                   <a:srgbClr val="444A52"/>
                 </a:solidFill>
               </a:defRPr>
             </a:pPr>
             <a:r>
-              <a:t>•  Atípicos: 0.25 % en target, 2.58 % en humedad del suelo. No se eliminaron: se agrupan en años y regiones concretos y son lo que el reto busca anticipar.</a:t>
-            </a:r>
-          </a:p>
-        </p:txBody>
-      </p:sp>
-      <p:pic>
-        <p:nvPicPr>
-          <p:cNvPr id="4" name="Picture 3" descr="10_cobertura_temporal.png"/>
-          <p:cNvPicPr>
-            <a:picLocks noChangeAspect="1"/>
-          </p:cNvPicPr>
-          <p:nvPr/>
-        </p:nvPicPr>
-        <p:blipFill>
-          <a:blip r:embed="rId2"/>
-          <a:stretch>
-            <a:fillRect/>
-          </a:stretch>
-        </p:blipFill>
-        <p:spPr>
-          <a:xfrm>
-            <a:off x="5852160" y="2103120"/>
-            <a:ext cx="5943600" cy="2353038"/>
-          </a:xfrm>
-          <a:prstGeom prst="rect">
-            <a:avLst/>
-          </a:prstGeom>
-        </p:spPr>
-      </p:pic>
-      <p:sp>
-        <p:nvSpPr>
-          <p:cNvPr id="5" name="TextBox 4"/>
+              <a:t>•  Formato plano: una fila por combinación de mes y celda.</a:t>
+            </a:r>
+          </a:p>
+          <a:p>
+            <a:pPr>
+              <a:spcAft>
+                <a:spcPts val="800"/>
+              </a:spcAft>
+              <a:defRPr sz="1600">
+                <a:solidFill>
+                  <a:srgbClr val="444A52"/>
+                </a:solidFill>
+              </a:defRPr>
+            </a:pPr>
+            <a:r>
+              <a:t>•  Variables: TWS_t, SPEI a 1/3/6/12 meses, humedad del suelo y la variable objetivo (TWS del mes siguiente).</a:t>
+            </a:r>
+          </a:p>
+          <a:p>
+            <a:pPr>
+              <a:spcAft>
+                <a:spcPts val="800"/>
+              </a:spcAft>
+              <a:defRPr sz="1600">
+                <a:solidFill>
+                  <a:srgbClr val="444A52"/>
+                </a:solidFill>
+              </a:defRPr>
+            </a:pPr>
+            <a:r>
+              <a:t>•  Todas están estandarizadas y son adimensionales: no son centímetros de agua.</a:t>
+            </a:r>
+          </a:p>
+        </p:txBody>
+      </p:sp>
+      <p:sp>
+        <p:nvSpPr>
+          <p:cNvPr id="4" name="TextBox 3"/>
           <p:cNvSpPr txBox="1"/>
           <p:nvPr/>
         </p:nvSpPr>
@@ -4231,14 +7727,14 @@
           <a:lstStyle/>
           <a:p>
             <a:pPr>
-              <a:defRPr sz="1600" i="1" b="1">
+              <a:defRPr sz="1500" i="1" b="1">
                 <a:solidFill>
                   <a:srgbClr val="0F6E63"/>
                 </a:solidFill>
               </a:defRPr>
             </a:pPr>
             <a:r>
-              <a:t>isna().sum() daba cero y aun así faltaba el 14 % del periodo.</a:t>
+              <a:t>Una fila por mes y por celda del planeta.</a:t>
             </a:r>
           </a:p>
         </p:txBody>
@@ -4269,8 +7765,8 @@
         </p:nvSpPr>
         <p:spPr>
           <a:xfrm>
-            <a:off x="548640" y="320040"/>
-            <a:ext cx="11094415" cy="822960"/>
+            <a:off x="548640" y="274320"/>
+            <a:ext cx="11094415" cy="731520"/>
           </a:xfrm>
           <a:prstGeom prst="rect">
             <a:avLst/>
@@ -4284,14 +7780,14 @@
           <a:lstStyle/>
           <a:p>
             <a:pPr>
-              <a:defRPr sz="3200" b="1">
+              <a:defRPr sz="3000" b="1">
                 <a:solidFill>
                   <a:srgbClr val="1F3A5F"/>
                 </a:solidFill>
               </a:defRPr>
             </a:pPr>
             <a:r>
-              <a:t>Principales patrones temporales</a:t>
+              <a:t>Calidad de los datos: lo que el conteo de nulos no ve</a:t>
             </a:r>
           </a:p>
         </p:txBody>
@@ -4304,8 +7800,8 @@
         </p:nvSpPr>
         <p:spPr>
           <a:xfrm>
-            <a:off x="640080" y="1188720"/>
-            <a:ext cx="10911535" cy="4023360"/>
+            <a:off x="640080" y="1143000"/>
+            <a:ext cx="5394960" cy="4023360"/>
           </a:xfrm>
           <a:prstGeom prst="rect">
             <a:avLst/>
@@ -4320,7 +7816,7 @@
           <a:p>
             <a:pPr>
               <a:spcAft>
-                <a:spcPts val="1000"/>
+                <a:spcPts val="800"/>
               </a:spcAft>
               <a:defRPr sz="1500">
                 <a:solidFill>
@@ -4329,13 +7825,13 @@
               </a:defRPr>
             </a:pPr>
             <a:r>
-              <a:t>•  Tendencia descendente: el promedio anual cae de 0.322 en 2004 a −0.136 en 2015.</a:t>
+              <a:t>•  Cero valores nulos en las 13 columnas. Cero duplicados. Cero identificadores repetidos.</a:t>
             </a:r>
           </a:p>
           <a:p>
             <a:pPr>
               <a:spcAft>
-                <a:spcPts val="1000"/>
+                <a:spcPts val="800"/>
               </a:spcAft>
               <a:defRPr sz="1500">
                 <a:solidFill>
@@ -4344,13 +7840,13 @@
               </a:defRPr>
             </a:pPr>
             <a:r>
-              <a:t>•  La serie no es estacionaria (Dickey-Fuller, p = 0.526). La tendencia explica el 64 % de la varianza; el ciclo anual, solo el 3 %.</a:t>
+              <a:t>•  Y sin embargo faltaba el 14 % del periodo.</a:t>
             </a:r>
           </a:p>
           <a:p>
             <a:pPr>
               <a:spcAft>
-                <a:spcPts val="1000"/>
+                <a:spcPts val="800"/>
               </a:spcAft>
               <a:defRPr sz="1500">
                 <a:solidFill>
@@ -4359,14 +7855,29 @@
               </a:defRPr>
             </a:pPr>
             <a:r>
-              <a:t>•  No depende de la agregación: promedio simple y ponderado por área correlacionan 0.936.</a:t>
+              <a:t>•  El formato es plano: si un mes no se observó, no genera filas — en vez de generar NaN. El conteo de nulos no puede detectarlo.</a:t>
+            </a:r>
+          </a:p>
+          <a:p>
+            <a:pPr>
+              <a:spcAft>
+                <a:spcPts val="800"/>
+              </a:spcAft>
+              <a:defRPr sz="1500">
+                <a:solidFill>
+                  <a:srgbClr val="444A52"/>
+                </a:solidFill>
+              </a:defRPr>
+            </a:pPr>
+            <a:r>
+              <a:t>•  Faltan 22 de los 160 meses del calendario, concentrados en 2002–2003 y 2011–2014. Los años 2004 a 2010 están completos.</a:t>
             </a:r>
           </a:p>
         </p:txBody>
       </p:sp>
       <p:pic>
         <p:nvPicPr>
-          <p:cNvPr id="4" name="Picture 3" descr="16_media_movil.png"/>
+          <p:cNvPr id="4" name="Picture 3" descr="10_cobertura_temporal.png"/>
           <p:cNvPicPr>
             <a:picLocks noChangeAspect="1"/>
           </p:cNvPicPr>
@@ -4380,8 +7891,8 @@
         </p:blipFill>
         <p:spPr>
           <a:xfrm>
-            <a:off x="1463040" y="2606040"/>
-            <a:ext cx="9235440" cy="3678184"/>
+            <a:off x="5943600" y="2194560"/>
+            <a:ext cx="5760720" cy="2280637"/>
           </a:xfrm>
           <a:prstGeom prst="rect">
             <a:avLst/>
@@ -4411,14 +7922,14 @@
           <a:lstStyle/>
           <a:p>
             <a:pPr>
-              <a:defRPr sz="1600" i="1" b="1">
+              <a:defRPr sz="1500" i="1" b="1">
                 <a:solidFill>
                   <a:srgbClr val="0F6E63"/>
                 </a:solidFill>
               </a:defRPr>
             </a:pPr>
             <a:r>
-              <a:t>El registro muestra un descenso sostenido, y la serie tiene memoria larga.</a:t>
+              <a:t>isna().sum() daba cero y aun así faltaba el 14 % del periodo.</a:t>
             </a:r>
           </a:p>
         </p:txBody>
@@ -4449,8 +7960,8 @@
         </p:nvSpPr>
         <p:spPr>
           <a:xfrm>
-            <a:off x="548640" y="320040"/>
-            <a:ext cx="11094415" cy="822960"/>
+            <a:off x="548640" y="274320"/>
+            <a:ext cx="11094415" cy="731520"/>
           </a:xfrm>
           <a:prstGeom prst="rect">
             <a:avLst/>
@@ -4464,89 +7975,21 @@
           <a:lstStyle/>
           <a:p>
             <a:pPr>
-              <a:defRPr sz="3200" b="1">
+              <a:defRPr sz="3000" b="1">
                 <a:solidFill>
                   <a:srgbClr val="1F3A5F"/>
                 </a:solidFill>
               </a:defRPr>
             </a:pPr>
             <a:r>
-              <a:t>La estacionalidad que casi no vemos</a:t>
-            </a:r>
-          </a:p>
-        </p:txBody>
-      </p:sp>
-      <p:sp>
-        <p:nvSpPr>
-          <p:cNvPr id="3" name="TextBox 2"/>
-          <p:cNvSpPr txBox="1"/>
-          <p:nvPr/>
-        </p:nvSpPr>
-        <p:spPr>
-          <a:xfrm>
-            <a:off x="640080" y="1188720"/>
-            <a:ext cx="10911535" cy="4023360"/>
-          </a:xfrm>
-          <a:prstGeom prst="rect">
-            <a:avLst/>
-          </a:prstGeom>
-          <a:noFill/>
-        </p:spPr>
-        <p:txBody>
-          <a:bodyPr wrap="square">
-            <a:spAutoFit/>
-          </a:bodyPr>
-          <a:lstStyle/>
-          <a:p>
-            <a:pPr>
-              <a:spcAft>
-                <a:spcPts val="1000"/>
-              </a:spcAft>
-              <a:defRPr sz="1500">
-                <a:solidFill>
-                  <a:srgbClr val="444A52"/>
-                </a:solidFill>
-              </a:defRPr>
-            </a:pPr>
-            <a:r>
-              <a:t>•  A primera vista no hay estacionalidad: solo el 3 % de la varianza.</a:t>
-            </a:r>
-          </a:p>
-          <a:p>
-            <a:pPr>
-              <a:spcAft>
-                <a:spcPts val="1000"/>
-              </a:spcAft>
-              <a:defRPr sz="1500">
-                <a:solidFill>
-                  <a:srgbClr val="444A52"/>
-                </a:solidFill>
-              </a:defRPr>
-            </a:pPr>
-            <a:r>
-              <a:t>•  La causa: los hemisferios tienen ciclos opuestos y se cancelan al promediarse. El norte promedia positivo los 12 meses; el sur cae a −0.105 en junio.</a:t>
-            </a:r>
-          </a:p>
-          <a:p>
-            <a:pPr>
-              <a:spcAft>
-                <a:spcPts val="1000"/>
-              </a:spcAft>
-              <a:defRPr sz="1500">
-                <a:solidFill>
-                  <a:srgbClr val="444A52"/>
-                </a:solidFill>
-              </a:defRPr>
-            </a:pPr>
-            <a:r>
-              <a:t>•  Además, el 80.3 % de las celdas están en el hemisferio norte. Al separar por banda de latitud, el ciclo anual reaparece.</a:t>
+              <a:t>Distribuciones de las variables</a:t>
             </a:r>
           </a:p>
         </p:txBody>
       </p:sp>
       <p:pic>
         <p:nvPicPr>
-          <p:cNvPr id="4" name="Picture 3" descr="17_perfil_estacional.png"/>
+          <p:cNvPr id="3" name="Picture 2" descr="14_histogramas_variables.png"/>
           <p:cNvPicPr>
             <a:picLocks noChangeAspect="1"/>
           </p:cNvPicPr>
@@ -4560,14 +8003,97 @@
         </p:blipFill>
         <p:spPr>
           <a:xfrm>
-            <a:off x="1280160" y="2743200"/>
-            <a:ext cx="9601200" cy="2948697"/>
+            <a:off x="640080" y="1188720"/>
+            <a:ext cx="5852160" cy="4377038"/>
           </a:xfrm>
           <a:prstGeom prst="rect">
             <a:avLst/>
           </a:prstGeom>
         </p:spPr>
       </p:pic>
+      <p:sp>
+        <p:nvSpPr>
+          <p:cNvPr id="4" name="TextBox 3"/>
+          <p:cNvSpPr txBox="1"/>
+          <p:nvPr/>
+        </p:nvSpPr>
+        <p:spPr>
+          <a:xfrm>
+            <a:off x="6766560" y="1463040"/>
+            <a:ext cx="4937760" cy="4023360"/>
+          </a:xfrm>
+          <a:prstGeom prst="rect">
+            <a:avLst/>
+          </a:prstGeom>
+          <a:noFill/>
+        </p:spPr>
+        <p:txBody>
+          <a:bodyPr wrap="square">
+            <a:spAutoFit/>
+          </a:bodyPr>
+          <a:lstStyle/>
+          <a:p>
+            <a:pPr>
+              <a:spcAft>
+                <a:spcPts val="800"/>
+              </a:spcAft>
+              <a:defRPr sz="1400">
+                <a:solidFill>
+                  <a:srgbClr val="444A52"/>
+                </a:solidFill>
+              </a:defRPr>
+            </a:pPr>
+            <a:r>
+              <a:t>•  Todas unimodales y casi simétricas: la asimetría va de −0.14 a 0.09.</a:t>
+            </a:r>
+          </a:p>
+          <a:p>
+            <a:pPr>
+              <a:spcAft>
+                <a:spcPts val="800"/>
+              </a:spcAft>
+              <a:defRPr sz="1400">
+                <a:solidFill>
+                  <a:srgbClr val="444A52"/>
+                </a:solidFill>
+              </a:defRPr>
+            </a:pPr>
+            <a:r>
+              <a:t>•  Media y mediana casi coinciden en cada variable.</a:t>
+            </a:r>
+          </a:p>
+          <a:p>
+            <a:pPr>
+              <a:spcAft>
+                <a:spcPts val="800"/>
+              </a:spcAft>
+              <a:defRPr sz="1400">
+                <a:solidFill>
+                  <a:srgbClr val="444A52"/>
+                </a:solidFill>
+              </a:defRPr>
+            </a:pPr>
+            <a:r>
+              <a:t>•  No hay señal de mezcla de poblaciones: ningún segundo máximo.</a:t>
+            </a:r>
+          </a:p>
+          <a:p>
+            <a:pPr>
+              <a:spcAft>
+                <a:spcPts val="800"/>
+              </a:spcAft>
+              <a:defRPr sz="1400">
+                <a:solidFill>
+                  <a:srgbClr val="444A52"/>
+                </a:solidFill>
+              </a:defRPr>
+            </a:pPr>
+            <a:r>
+              <a:t>•  La humedad del suelo es la más concentrada (IQR 0.95) pero con el rango más amplio (10.49): casi todo cerca de lo normal y unos pocos valores muy lejos.</a:t>
+            </a:r>
+          </a:p>
+        </p:txBody>
+      </p:sp>
       <p:sp>
         <p:nvSpPr>
           <p:cNvPr id="5" name="TextBox 4"/>
@@ -4591,14 +8117,14 @@
           <a:lstStyle/>
           <a:p>
             <a:pPr>
-              <a:defRPr sz="1600" i="1" b="1">
+              <a:defRPr sz="1500" i="1" b="1">
                 <a:solidFill>
                   <a:srgbClr val="0F6E63"/>
                 </a:solidFill>
               </a:defRPr>
             </a:pPr>
             <a:r>
-              <a:t>Promediar el planeta entero borra el fenómeno. Hay que mirar por región.</a:t>
+              <a:t>Distribuciones limpias: es lo esperable de índices estandarizados.</a:t>
             </a:r>
           </a:p>
         </p:txBody>
@@ -4629,8 +8155,8 @@
         </p:nvSpPr>
         <p:spPr>
           <a:xfrm>
-            <a:off x="548640" y="320040"/>
-            <a:ext cx="11094415" cy="822960"/>
+            <a:off x="548640" y="274320"/>
+            <a:ext cx="11094415" cy="731520"/>
           </a:xfrm>
           <a:prstGeom prst="rect">
             <a:avLst/>
@@ -4644,21 +8170,89 @@
           <a:lstStyle/>
           <a:p>
             <a:pPr>
-              <a:defRPr sz="3200" b="1">
+              <a:defRPr sz="3000" b="1">
                 <a:solidFill>
                   <a:srgbClr val="1F3A5F"/>
                 </a:solidFill>
               </a:defRPr>
             </a:pPr>
             <a:r>
-              <a:t>Principales relaciones entre variables</a:t>
+              <a:t>Valores atípicos: por qué no los eliminamos</a:t>
+            </a:r>
+          </a:p>
+        </p:txBody>
+      </p:sp>
+      <p:sp>
+        <p:nvSpPr>
+          <p:cNvPr id="3" name="TextBox 2"/>
+          <p:cNvSpPr txBox="1"/>
+          <p:nvPr/>
+        </p:nvSpPr>
+        <p:spPr>
+          <a:xfrm>
+            <a:off x="640080" y="1143000"/>
+            <a:ext cx="10911535" cy="4023360"/>
+          </a:xfrm>
+          <a:prstGeom prst="rect">
+            <a:avLst/>
+          </a:prstGeom>
+          <a:noFill/>
+        </p:spPr>
+        <p:txBody>
+          <a:bodyPr wrap="square">
+            <a:spAutoFit/>
+          </a:bodyPr>
+          <a:lstStyle/>
+          <a:p>
+            <a:pPr>
+              <a:spcAft>
+                <a:spcPts val="800"/>
+              </a:spcAft>
+              <a:defRPr sz="1500">
+                <a:solidFill>
+                  <a:srgbClr val="444A52"/>
+                </a:solidFill>
+              </a:defRPr>
+            </a:pPr>
+            <a:r>
+              <a:t>•  Por criterio IQR: 0.25 % en la variable objetivo, 2.58 % en humedad del suelo.</a:t>
+            </a:r>
+          </a:p>
+          <a:p>
+            <a:pPr>
+              <a:spcAft>
+                <a:spcPts val="800"/>
+              </a:spcAft>
+              <a:defRPr sz="1500">
+                <a:solidFill>
+                  <a:srgbClr val="444A52"/>
+                </a:solidFill>
+              </a:defRPr>
+            </a:pPr>
+            <a:r>
+              <a:t>•  Decisión: no se eliminó ninguno. Los extremos llegan a −3.97 y 4.06, magnitudes plausibles; no hay valores imposibles ni códigos centinela como −9999.</a:t>
+            </a:r>
+          </a:p>
+          <a:p>
+            <a:pPr>
+              <a:spcAft>
+                <a:spcPts val="800"/>
+              </a:spcAft>
+              <a:defRPr sz="1500">
+                <a:solidFill>
+                  <a:srgbClr val="444A52"/>
+                </a:solidFill>
+              </a:defRPr>
+            </a:pPr>
+            <a:r>
+              <a:t>•  La razón de fondo se ve abajo: no se reparten al azar. Se agrupan en años y en regiones concretos, que es la firma de eventos reales, no de errores de medición.</a:t>
             </a:r>
           </a:p>
         </p:txBody>
       </p:sp>
       <p:pic>
         <p:nvPicPr>
-          <p:cNvPr id="3" name="Picture 2" descr="19_matriz_correlacion.png"/>
+          <p:cNvPr id="4" name="Picture 3" descr="15_atipicos_tiempo_espacio.png"/>
           <p:cNvPicPr>
             <a:picLocks noChangeAspect="1"/>
           </p:cNvPicPr>
@@ -4672,187 +8266,14 @@
         </p:blipFill>
         <p:spPr>
           <a:xfrm>
-            <a:off x="640080" y="1234440"/>
-            <a:ext cx="5120640" cy="4503868"/>
+            <a:off x="822960" y="2971800"/>
+            <a:ext cx="10515600" cy="2902851"/>
           </a:xfrm>
           <a:prstGeom prst="rect">
             <a:avLst/>
           </a:prstGeom>
         </p:spPr>
       </p:pic>
-      <p:sp>
-        <p:nvSpPr>
-          <p:cNvPr id="4" name="TextBox 3"/>
-          <p:cNvSpPr txBox="1"/>
-          <p:nvPr/>
-        </p:nvSpPr>
-        <p:spPr>
-          <a:xfrm>
-            <a:off x="6126480" y="1371600"/>
-            <a:ext cx="5486400" cy="4023360"/>
-          </a:xfrm>
-          <a:prstGeom prst="rect">
-            <a:avLst/>
-          </a:prstGeom>
-          <a:noFill/>
-        </p:spPr>
-        <p:txBody>
-          <a:bodyPr wrap="square">
-            <a:spAutoFit/>
-          </a:bodyPr>
-          <a:lstStyle/>
-          <a:p>
-            <a:pPr>
-              <a:spcAft>
-                <a:spcPts val="1000"/>
-              </a:spcAft>
-              <a:defRPr sz="1400">
-                <a:solidFill>
-                  <a:srgbClr val="444A52"/>
-                </a:solidFill>
-              </a:defRPr>
-            </a:pPr>
-            <a:r>
-              <a:t>•  Correlación con target:</a:t>
-            </a:r>
-          </a:p>
-          <a:p>
-            <a:pPr>
-              <a:spcAft>
-                <a:spcPts val="1000"/>
-              </a:spcAft>
-              <a:defRPr sz="1400">
-                <a:solidFill>
-                  <a:srgbClr val="444A52"/>
-                </a:solidFill>
-              </a:defRPr>
-            </a:pPr>
-            <a:r>
-              <a:t>     TWS_t (persistencia) . . . 0.803</a:t>
-            </a:r>
-          </a:p>
-          <a:p>
-            <a:pPr>
-              <a:spcAft>
-                <a:spcPts val="1000"/>
-              </a:spcAft>
-              <a:defRPr sz="1400">
-                <a:solidFill>
-                  <a:srgbClr val="444A52"/>
-                </a:solidFill>
-              </a:defRPr>
-            </a:pPr>
-            <a:r>
-              <a:t>     SPEI_12_t . . . . . . . . . . 0.380</a:t>
-            </a:r>
-          </a:p>
-          <a:p>
-            <a:pPr>
-              <a:spcAft>
-                <a:spcPts val="1000"/>
-              </a:spcAft>
-              <a:defRPr sz="1400">
-                <a:solidFill>
-                  <a:srgbClr val="444A52"/>
-                </a:solidFill>
-              </a:defRPr>
-            </a:pPr>
-            <a:r>
-              <a:t>     SPEI_06_t . . . . . . . . . . 0.368</a:t>
-            </a:r>
-          </a:p>
-          <a:p>
-            <a:pPr>
-              <a:spcAft>
-                <a:spcPts val="1000"/>
-              </a:spcAft>
-              <a:defRPr sz="1400">
-                <a:solidFill>
-                  <a:srgbClr val="444A52"/>
-                </a:solidFill>
-              </a:defRPr>
-            </a:pPr>
-            <a:r>
-              <a:t>     SOIL_MOISTURE_t . . . . 0.320</a:t>
-            </a:r>
-          </a:p>
-          <a:p>
-            <a:pPr>
-              <a:spcAft>
-                <a:spcPts val="1000"/>
-              </a:spcAft>
-              <a:defRPr sz="1400">
-                <a:solidFill>
-                  <a:srgbClr val="444A52"/>
-                </a:solidFill>
-              </a:defRPr>
-            </a:pPr>
-            <a:r>
-              <a:t>     SPEI_03_t . . . . . . . . . . 0.285</a:t>
-            </a:r>
-          </a:p>
-          <a:p>
-            <a:pPr>
-              <a:spcAft>
-                <a:spcPts val="1000"/>
-              </a:spcAft>
-              <a:defRPr sz="1400">
-                <a:solidFill>
-                  <a:srgbClr val="444A52"/>
-                </a:solidFill>
-              </a:defRPr>
-            </a:pPr>
-            <a:r>
-              <a:t>     SPEI_01_t . . . . . . . . . . 0.204</a:t>
-            </a:r>
-          </a:p>
-          <a:p>
-            <a:pPr>
-              <a:spcAft>
-                <a:spcPts val="1000"/>
-              </a:spcAft>
-              <a:defRPr sz="1400">
-                <a:solidFill>
-                  <a:srgbClr val="444A52"/>
-                </a:solidFill>
-              </a:defRPr>
-            </a:pPr>
-            <a:r>
-              <a:t>•  Los SPEI se ordenan exactamente por escala de acumulación.</a:t>
-            </a:r>
-          </a:p>
-          <a:p>
-            <a:pPr>
-              <a:spcAft>
-                <a:spcPts val="1000"/>
-              </a:spcAft>
-              <a:defRPr sz="1400">
-                <a:solidFill>
-                  <a:srgbClr val="444A52"/>
-                </a:solidFill>
-              </a:defRPr>
-            </a:pPr>
-            <a:r>
-              <a:t>•  Relaciones lineales: Pearson y Spearman difieren ≤ 0.024.</a:t>
-            </a:r>
-          </a:p>
-          <a:p>
-            <a:pPr>
-              <a:spcAft>
-                <a:spcPts val="1000"/>
-              </a:spcAft>
-              <a:defRPr sz="1400">
-                <a:solidFill>
-                  <a:srgbClr val="444A52"/>
-                </a:solidFill>
-              </a:defRPr>
-            </a:pPr>
-            <a:r>
-              <a:t>•  Asociación, no causalidad.</a:t>
-            </a:r>
-          </a:p>
-        </p:txBody>
-      </p:sp>
       <p:sp>
         <p:nvSpPr>
           <p:cNvPr id="5" name="TextBox 4"/>
@@ -4876,14 +8297,14 @@
           <a:lstStyle/>
           <a:p>
             <a:pPr>
-              <a:defRPr sz="1600" i="1" b="1">
+              <a:defRPr sz="1500" i="1" b="1">
                 <a:solidFill>
                   <a:srgbClr val="0F6E63"/>
                 </a:solidFill>
               </a:defRPr>
             </a:pPr>
             <a:r>
-              <a:t>El agua tiene inercia, y la sequía de largo plazo importa más que la del mes pasado.</a:t>
+              <a:t>Eliminar los atípicos habría sido borrar el fenómeno de interés.</a:t>
             </a:r>
           </a:p>
         </p:txBody>
@@ -4914,8 +8335,8 @@
         </p:nvSpPr>
         <p:spPr>
           <a:xfrm>
-            <a:off x="548640" y="320040"/>
-            <a:ext cx="11094415" cy="822960"/>
+            <a:off x="548640" y="274320"/>
+            <a:ext cx="11094415" cy="731520"/>
           </a:xfrm>
           <a:prstGeom prst="rect">
             <a:avLst/>
@@ -4929,14 +8350,14 @@
           <a:lstStyle/>
           <a:p>
             <a:pPr>
-              <a:defRPr sz="3200" b="1">
+              <a:defRPr sz="3000" b="1">
                 <a:solidFill>
                   <a:srgbClr val="1F3A5F"/>
                 </a:solidFill>
               </a:defRPr>
             </a:pPr>
             <a:r>
-              <a:t>Hallazgos más importantes</a:t>
+              <a:t>Patrones temporales: una tendencia descendente</a:t>
             </a:r>
           </a:p>
         </p:txBody>
@@ -4949,7 +8370,7 @@
         </p:nvSpPr>
         <p:spPr>
           <a:xfrm>
-            <a:off x="640080" y="1371600"/>
+            <a:off x="640080" y="1143000"/>
             <a:ext cx="10911535" cy="4023360"/>
           </a:xfrm>
           <a:prstGeom prst="rect">
@@ -4965,7 +8386,7 @@
           <a:p>
             <a:pPr>
               <a:spcAft>
-                <a:spcPts val="1000"/>
+                <a:spcPts val="800"/>
               </a:spcAft>
               <a:defRPr sz="1500">
                 <a:solidFill>
@@ -4974,13 +8395,13 @@
               </a:defRPr>
             </a:pPr>
             <a:r>
-              <a:t>•  Sin nulos ni duplicados, pero faltan 22 meses completos del calendario.</a:t>
+              <a:t>•  El promedio anual cae de 0.322 en 2004 a −0.136 en 2015.</a:t>
             </a:r>
           </a:p>
           <a:p>
             <a:pPr>
               <a:spcAft>
-                <a:spcPts val="1000"/>
+                <a:spcPts val="800"/>
               </a:spcAft>
               <a:defRPr sz="1500">
                 <a:solidFill>
@@ -4989,13 +8410,13 @@
               </a:defRPr>
             </a:pPr>
             <a:r>
-              <a:t>•  target es el TWS del mes calendario t+1 — verificado celda por celda.</a:t>
+              <a:t>•  La serie no es estacionaria en media: prueba de Dickey-Fuller con p = 0.526, no se rechaza la raíz unitaria.</a:t>
             </a:r>
           </a:p>
           <a:p>
             <a:pPr>
               <a:spcAft>
-                <a:spcPts val="1000"/>
+                <a:spcPts val="800"/>
               </a:spcAft>
               <a:defRPr sz="1500">
                 <a:solidFill>
@@ -5004,82 +8425,66 @@
               </a:defRPr>
             </a:pPr>
             <a:r>
-              <a:t>•  Las variables están estandarizadas; no admiten lectura como volumen físico.</a:t>
-            </a:r>
-          </a:p>
-          <a:p>
-            <a:pPr>
-              <a:spcAft>
-                <a:spcPts val="1000"/>
-              </a:spcAft>
-              <a:defRPr sz="1500">
-                <a:solidFill>
-                  <a:srgbClr val="444A52"/>
-                </a:solidFill>
-              </a:defRPr>
-            </a:pPr>
-            <a:r>
-              <a:t>•  Tendencia descendente y serie no estacionaria en media.</a:t>
-            </a:r>
-          </a:p>
-          <a:p>
-            <a:pPr>
-              <a:spcAft>
-                <a:spcPts val="1000"/>
-              </a:spcAft>
-              <a:defRPr sz="1500">
-                <a:solidFill>
-                  <a:srgbClr val="444A52"/>
-                </a:solidFill>
-              </a:defRPr>
-            </a:pPr>
-            <a:r>
-              <a:t>•  La estacionalidad se cancela globalmente pero existe por región.</a:t>
-            </a:r>
-          </a:p>
-          <a:p>
-            <a:pPr>
-              <a:spcAft>
-                <a:spcPts val="1000"/>
-              </a:spcAft>
-              <a:defRPr sz="1500">
-                <a:solidFill>
-                  <a:srgbClr val="444A52"/>
-                </a:solidFill>
-              </a:defRPr>
-            </a:pPr>
-            <a:r>
-              <a:t>•  Desbalance espacial: 80 % hemisferio norte; medias de −0.222 a 0.327 según banda.</a:t>
-            </a:r>
-          </a:p>
-          <a:p>
-            <a:pPr>
-              <a:spcAft>
-                <a:spcPts val="1000"/>
-              </a:spcAft>
-              <a:defRPr sz="1500">
-                <a:solidFill>
-                  <a:srgbClr val="444A52"/>
-                </a:solidFill>
-              </a:defRPr>
-            </a:pPr>
-            <a:r>
-              <a:t>•  Persistencia dominante (r = 0.803).</a:t>
-            </a:r>
-          </a:p>
-          <a:p>
-            <a:pPr>
-              <a:spcAft>
-                <a:spcPts val="1000"/>
-              </a:spcAft>
-              <a:defRPr sz="1500">
-                <a:solidFill>
-                  <a:srgbClr val="444A52"/>
-                </a:solidFill>
-              </a:defRPr>
-            </a:pPr>
-            <a:r>
-              <a:t>•  Línea base a superar: RMSE 0.5724.</a:t>
+              <a:t>•  No depende de cómo se agregue: el promedio simple y el ponderado por área correlacionan 0.936.</a:t>
+            </a:r>
+          </a:p>
+        </p:txBody>
+      </p:sp>
+      <p:pic>
+        <p:nvPicPr>
+          <p:cNvPr id="4" name="Picture 3" descr="16_media_movil.png"/>
+          <p:cNvPicPr>
+            <a:picLocks noChangeAspect="1"/>
+          </p:cNvPicPr>
+          <p:nvPr/>
+        </p:nvPicPr>
+        <p:blipFill>
+          <a:blip r:embed="rId2"/>
+          <a:stretch>
+            <a:fillRect/>
+          </a:stretch>
+        </p:blipFill>
+        <p:spPr>
+          <a:xfrm>
+            <a:off x="1463040" y="2514600"/>
+            <a:ext cx="9235440" cy="3678184"/>
+          </a:xfrm>
+          <a:prstGeom prst="rect">
+            <a:avLst/>
+          </a:prstGeom>
+        </p:spPr>
+      </p:pic>
+      <p:sp>
+        <p:nvSpPr>
+          <p:cNvPr id="5" name="TextBox 4"/>
+          <p:cNvSpPr txBox="1"/>
+          <p:nvPr/>
+        </p:nvSpPr>
+        <p:spPr>
+          <a:xfrm>
+            <a:off x="640080" y="6144768"/>
+            <a:ext cx="10911535" cy="502920"/>
+          </a:xfrm>
+          <a:prstGeom prst="rect">
+            <a:avLst/>
+          </a:prstGeom>
+          <a:noFill/>
+        </p:spPr>
+        <p:txBody>
+          <a:bodyPr wrap="none">
+            <a:spAutoFit/>
+          </a:bodyPr>
+          <a:lstStyle/>
+          <a:p>
+            <a:pPr>
+              <a:defRPr sz="1500" i="1" b="1">
+                <a:solidFill>
+                  <a:srgbClr val="0F6E63"/>
+                </a:solidFill>
+              </a:defRPr>
+            </a:pPr>
+            <a:r>
+              <a:t>El registro muestra un descenso sostenido, y la serie tiene memoria larga.</a:t>
             </a:r>
           </a:p>
         </p:txBody>
@@ -5410,4 +8815,324 @@
   </a:objectDefaults>
   <a:extraClrSchemeLst/>
 </a:theme>
+</file>
+
+<file path=ppt/theme/theme2.xml><?xml version="1.0" encoding="utf-8"?>
+<a:theme xmlns:a="http://schemas.openxmlformats.org/drawingml/2006/main" name="Office Theme">
+  <a:themeElements>
+    <a:clrScheme name="Office">
+      <a:dk1>
+        <a:sysClr val="windowText" lastClr="000000"/>
+      </a:dk1>
+      <a:lt1>
+        <a:sysClr val="window" lastClr="FFFFFF"/>
+      </a:lt1>
+      <a:dk2>
+        <a:srgbClr val="1F497D"/>
+      </a:dk2>
+      <a:lt2>
+        <a:srgbClr val="EEECE1"/>
+      </a:lt2>
+      <a:accent1>
+        <a:srgbClr val="4F81BD"/>
+      </a:accent1>
+      <a:accent2>
+        <a:srgbClr val="C0504D"/>
+      </a:accent2>
+      <a:accent3>
+        <a:srgbClr val="9BBB59"/>
+      </a:accent3>
+      <a:accent4>
+        <a:srgbClr val="8064A2"/>
+      </a:accent4>
+      <a:accent5>
+        <a:srgbClr val="4BACC6"/>
+      </a:accent5>
+      <a:accent6>
+        <a:srgbClr val="F79646"/>
+      </a:accent6>
+      <a:hlink>
+        <a:srgbClr val="0000FF"/>
+      </a:hlink>
+      <a:folHlink>
+        <a:srgbClr val="800080"/>
+      </a:folHlink>
+    </a:clrScheme>
+    <a:fontScheme name="Office">
+      <a:majorFont>
+        <a:latin typeface="Calibri"/>
+        <a:ea typeface=""/>
+        <a:cs typeface=""/>
+        <a:font script="Jpan" typeface="ＭＳ Ｐゴシック"/>
+        <a:font script="Hang" typeface="맑은 고딕"/>
+        <a:font script="Hans" typeface="宋体"/>
+        <a:font script="Hant" typeface="新細明體"/>
+        <a:font script="Arab" typeface="Times New Roman"/>
+        <a:font script="Hebr" typeface="Times New Roman"/>
+        <a:font script="Thai" typeface="Angsana New"/>
+        <a:font script="Ethi" typeface="Nyala"/>
+        <a:font script="Beng" typeface="Vrinda"/>
+        <a:font script="Gujr" typeface="Shruti"/>
+        <a:font script="Khmr" typeface="MoolBoran"/>
+        <a:font script="Knda" typeface="Tunga"/>
+        <a:font script="Guru" typeface="Raavi"/>
+        <a:font script="Cans" typeface="Euphemia"/>
+        <a:font script="Cher" typeface="Plantagenet Cherokee"/>
+        <a:font script="Yiii" typeface="Microsoft Yi Baiti"/>
+        <a:font script="Tibt" typeface="Microsoft Himalaya"/>
+        <a:font script="Thaa" typeface="MV Boli"/>
+        <a:font script="Deva" typeface="Mangal"/>
+        <a:font script="Telu" typeface="Gautami"/>
+        <a:font script="Taml" typeface="Latha"/>
+        <a:font script="Syrc" typeface="Estrangelo Edessa"/>
+        <a:font script="Orya" typeface="Kalinga"/>
+        <a:font script="Mlym" typeface="Kartika"/>
+        <a:font script="Laoo" typeface="DokChampa"/>
+        <a:font script="Sinh" typeface="Iskoola Pota"/>
+        <a:font script="Mong" typeface="Mongolian Baiti"/>
+        <a:font script="Viet" typeface="Times New Roman"/>
+        <a:font script="Uigh" typeface="Microsoft Uighur"/>
+        <a:font script="Geor" typeface="Sylfaen"/>
+      </a:majorFont>
+      <a:minorFont>
+        <a:latin typeface="Calibri"/>
+        <a:ea typeface=""/>
+        <a:cs typeface=""/>
+        <a:font script="Jpan" typeface="ＭＳ Ｐゴシック"/>
+        <a:font script="Hang" typeface="맑은 고딕"/>
+        <a:font script="Hans" typeface="宋体"/>
+        <a:font script="Hant" typeface="新細明體"/>
+        <a:font script="Arab" typeface="Arial"/>
+        <a:font script="Hebr" typeface="Arial"/>
+        <a:font script="Thai" typeface="Cordia New"/>
+        <a:font script="Ethi" typeface="Nyala"/>
+        <a:font script="Beng" typeface="Vrinda"/>
+        <a:font script="Gujr" typeface="Shruti"/>
+        <a:font script="Khmr" typeface="DaunPenh"/>
+        <a:font script="Knda" typeface="Tunga"/>
+        <a:font script="Guru" typeface="Raavi"/>
+        <a:font script="Cans" typeface="Euphemia"/>
+        <a:font script="Cher" typeface="Plantagenet Cherokee"/>
+        <a:font script="Yiii" typeface="Microsoft Yi Baiti"/>
+        <a:font script="Tibt" typeface="Microsoft Himalaya"/>
+        <a:font script="Thaa" typeface="MV Boli"/>
+        <a:font script="Deva" typeface="Mangal"/>
+        <a:font script="Telu" typeface="Gautami"/>
+        <a:font script="Taml" typeface="Latha"/>
+        <a:font script="Syrc" typeface="Estrangelo Edessa"/>
+        <a:font script="Orya" typeface="Kalinga"/>
+        <a:font script="Mlym" typeface="Kartika"/>
+        <a:font script="Laoo" typeface="DokChampa"/>
+        <a:font script="Sinh" typeface="Iskoola Pota"/>
+        <a:font script="Mong" typeface="Mongolian Baiti"/>
+        <a:font script="Viet" typeface="Arial"/>
+        <a:font script="Uigh" typeface="Microsoft Uighur"/>
+        <a:font script="Geor" typeface="Sylfaen"/>
+      </a:minorFont>
+    </a:fontScheme>
+    <a:fmtScheme name="Office">
+      <a:fillStyleLst>
+        <a:solidFill>
+          <a:schemeClr val="phClr"/>
+        </a:solidFill>
+        <a:gradFill rotWithShape="1">
+          <a:gsLst>
+            <a:gs pos="0">
+              <a:schemeClr val="phClr">
+                <a:tint val="50000"/>
+                <a:satMod val="300000"/>
+              </a:schemeClr>
+            </a:gs>
+            <a:gs pos="35000">
+              <a:schemeClr val="phClr">
+                <a:tint val="37000"/>
+                <a:satMod val="300000"/>
+              </a:schemeClr>
+            </a:gs>
+            <a:gs pos="100000">
+              <a:schemeClr val="phClr">
+                <a:tint val="15000"/>
+                <a:satMod val="350000"/>
+              </a:schemeClr>
+            </a:gs>
+          </a:gsLst>
+          <a:lin ang="16200000" scaled="1"/>
+        </a:gradFill>
+        <a:gradFill rotWithShape="1">
+          <a:gsLst>
+            <a:gs pos="0">
+              <a:schemeClr val="phClr">
+                <a:tint val="100000"/>
+                <a:shade val="100000"/>
+                <a:satMod val="130000"/>
+              </a:schemeClr>
+            </a:gs>
+            <a:gs pos="100000">
+              <a:schemeClr val="phClr">
+                <a:tint val="50000"/>
+                <a:shade val="100000"/>
+                <a:satMod val="350000"/>
+              </a:schemeClr>
+            </a:gs>
+          </a:gsLst>
+          <a:lin ang="16200000" scaled="0"/>
+        </a:gradFill>
+      </a:fillStyleLst>
+      <a:lnStyleLst>
+        <a:ln w="9525" cap="flat" cmpd="sng" algn="ctr">
+          <a:solidFill>
+            <a:schemeClr val="phClr">
+              <a:shade val="95000"/>
+              <a:satMod val="105000"/>
+            </a:schemeClr>
+          </a:solidFill>
+          <a:prstDash val="solid"/>
+        </a:ln>
+        <a:ln w="25400" cap="flat" cmpd="sng" algn="ctr">
+          <a:solidFill>
+            <a:schemeClr val="phClr"/>
+          </a:solidFill>
+          <a:prstDash val="solid"/>
+        </a:ln>
+        <a:ln w="38100" cap="flat" cmpd="sng" algn="ctr">
+          <a:solidFill>
+            <a:schemeClr val="phClr"/>
+          </a:solidFill>
+          <a:prstDash val="solid"/>
+        </a:ln>
+      </a:lnStyleLst>
+      <a:effectStyleLst>
+        <a:effectStyle>
+          <a:effectLst>
+            <a:outerShdw blurRad="40000" dist="20000" dir="5400000" rotWithShape="0">
+              <a:srgbClr val="000000">
+                <a:alpha val="38000"/>
+              </a:srgbClr>
+            </a:outerShdw>
+          </a:effectLst>
+        </a:effectStyle>
+        <a:effectStyle>
+          <a:effectLst>
+            <a:outerShdw blurRad="40000" dist="23000" dir="5400000" rotWithShape="0">
+              <a:srgbClr val="000000">
+                <a:alpha val="35000"/>
+              </a:srgbClr>
+            </a:outerShdw>
+          </a:effectLst>
+        </a:effectStyle>
+        <a:effectStyle>
+          <a:effectLst>
+            <a:outerShdw blurRad="40000" dist="23000" dir="5400000" rotWithShape="0">
+              <a:srgbClr val="000000">
+                <a:alpha val="35000"/>
+              </a:srgbClr>
+            </a:outerShdw>
+          </a:effectLst>
+          <a:scene3d>
+            <a:camera prst="orthographicFront">
+              <a:rot lat="0" lon="0" rev="0"/>
+            </a:camera>
+            <a:lightRig rig="threePt" dir="t">
+              <a:rot lat="0" lon="0" rev="1200000"/>
+            </a:lightRig>
+          </a:scene3d>
+          <a:sp3d>
+            <a:bevelT w="63500" h="25400"/>
+          </a:sp3d>
+        </a:effectStyle>
+      </a:effectStyleLst>
+      <a:bgFillStyleLst>
+        <a:solidFill>
+          <a:schemeClr val="phClr"/>
+        </a:solidFill>
+        <a:gradFill rotWithShape="1">
+          <a:gsLst>
+            <a:gs pos="0">
+              <a:schemeClr val="phClr">
+                <a:tint val="40000"/>
+                <a:satMod val="350000"/>
+              </a:schemeClr>
+            </a:gs>
+            <a:gs pos="40000">
+              <a:schemeClr val="phClr">
+                <a:tint val="45000"/>
+                <a:shade val="99000"/>
+                <a:satMod val="350000"/>
+              </a:schemeClr>
+            </a:gs>
+            <a:gs pos="100000">
+              <a:schemeClr val="phClr">
+                <a:shade val="20000"/>
+                <a:satMod val="255000"/>
+              </a:schemeClr>
+            </a:gs>
+          </a:gsLst>
+          <a:path path="circle">
+            <a:fillToRect l="50000" t="-80000" r="50000" b="180000"/>
+          </a:path>
+        </a:gradFill>
+        <a:gradFill rotWithShape="1">
+          <a:gsLst>
+            <a:gs pos="0">
+              <a:schemeClr val="phClr">
+                <a:tint val="80000"/>
+                <a:satMod val="300000"/>
+              </a:schemeClr>
+            </a:gs>
+            <a:gs pos="100000">
+              <a:schemeClr val="phClr">
+                <a:shade val="30000"/>
+                <a:satMod val="200000"/>
+              </a:schemeClr>
+            </a:gs>
+          </a:gsLst>
+          <a:path path="circle">
+            <a:fillToRect l="50000" t="50000" r="50000" b="50000"/>
+          </a:path>
+        </a:gradFill>
+      </a:bgFillStyleLst>
+    </a:fmtScheme>
+  </a:themeElements>
+  <a:objectDefaults>
+    <a:spDef>
+      <a:spPr/>
+      <a:bodyPr/>
+      <a:lstStyle/>
+      <a:style>
+        <a:lnRef idx="1">
+          <a:schemeClr val="accent1"/>
+        </a:lnRef>
+        <a:fillRef idx="3">
+          <a:schemeClr val="accent1"/>
+        </a:fillRef>
+        <a:effectRef idx="2">
+          <a:schemeClr val="accent1"/>
+        </a:effectRef>
+        <a:fontRef idx="minor">
+          <a:schemeClr val="lt1"/>
+        </a:fontRef>
+      </a:style>
+    </a:spDef>
+    <a:lnDef>
+      <a:spPr/>
+      <a:bodyPr/>
+      <a:lstStyle/>
+      <a:style>
+        <a:lnRef idx="2">
+          <a:schemeClr val="accent1"/>
+        </a:lnRef>
+        <a:fillRef idx="0">
+          <a:schemeClr val="accent1"/>
+        </a:fillRef>
+        <a:effectRef idx="1">
+          <a:schemeClr val="accent1"/>
+        </a:effectRef>
+        <a:fontRef idx="minor">
+          <a:schemeClr val="tx1"/>
+        </a:fontRef>
+      </a:style>
+    </a:lnDef>
+  </a:objectDefaults>
+  <a:extraClrSchemeLst/>
+</a:theme>
 </file>